--- a/Multiprotocol_Bootloader_CRL_Symposium.pptx
+++ b/Multiprotocol_Bootloader_CRL_Symposium.pptx
@@ -123,13 +123,37 @@
       </a:defRPr>
     </a:lvl9pPr>
   </p:defaultTextStyle>
+  <p:extLst>
+    <p:ext uri="{EFAFB233-063F-42B5-8137-9DF3F51BA10A}">
+      <p15:sldGuideLst xmlns:p15="http://schemas.microsoft.com/office/powerpoint/2012/main">
+        <p15:guide id="1" orient="horz" pos="2160">
+          <p15:clr>
+            <a:srgbClr val="A4A3A4"/>
+          </p15:clr>
+        </p15:guide>
+        <p15:guide id="2" pos="3840">
+          <p15:clr>
+            <a:srgbClr val="A4A3A4"/>
+          </p15:clr>
+        </p15:guide>
+      </p15:sldGuideLst>
+    </p:ext>
+  </p:extLst>
 </p:presentation>
 </file>
 
+<file path=ppt/revisionInfo.xml><?xml version="1.0" encoding="utf-8"?>
+<p1510:revInfo xmlns:a="http://schemas.openxmlformats.org/drawingml/2006/main" xmlns:r="http://schemas.openxmlformats.org/officeDocument/2006/relationships" xmlns:p1510="http://schemas.microsoft.com/office/powerpoint/2015/10/main">
+  <p1510:revLst>
+    <p1510:client id="{B7E32538-80CD-4FE4-A093-8D48B9661E90}" v="42" dt="2026-09-28T18:13:06.743"/>
+  </p1510:revLst>
+</p1510:revInfo>
+</file>
+
 <file path=ppt/charts/chart1.xml><?xml version="1.0" encoding="utf-8"?>
-<c:chartSpace xmlns:c="http://schemas.openxmlformats.org/drawingml/2006/chart" xmlns:a="http://schemas.openxmlformats.org/drawingml/2006/main" xmlns:r="http://schemas.openxmlformats.org/officeDocument/2006/relationships">
+<c:chartSpace xmlns:c="http://schemas.openxmlformats.org/drawingml/2006/chart" xmlns:a="http://schemas.openxmlformats.org/drawingml/2006/main" xmlns:r="http://schemas.openxmlformats.org/officeDocument/2006/relationships" xmlns:c16r2="http://schemas.microsoft.com/office/drawing/2015/06/chart">
   <c:date1904 val="0"/>
-  <c:lang val="en-IN"/>
+  <c:lang val="en-US"/>
   <c:roundedCorners val="1"/>
   <c:style val="2"/>
   <c:chart>
@@ -159,7 +183,6 @@
           </a:p>
         </c:rich>
       </c:tx>
-      <c:layout/>
       <c:overlay val="0"/>
     </c:title>
     <c:autoTitleDeleted val="0"/>
@@ -194,6 +217,11 @@
             <c:idx val="0"/>
             <c:invertIfNegative val="0"/>
             <c:bubble3D val="0"/>
+            <c:extLst>
+              <c:ext xmlns:c16="http://schemas.microsoft.com/office/drawing/2014/chart" uri="{C3380CC4-5D6E-409C-BE32-E72D297353CC}">
+                <c16:uniqueId val="{00000000-F778-4991-8286-C8E98D5345CB}"/>
+              </c:ext>
+            </c:extLst>
           </c:dPt>
           <c:dPt>
             <c:idx val="1"/>
@@ -205,6 +233,11 @@
               </a:solidFill>
               <a:effectLst/>
             </c:spPr>
+            <c:extLst>
+              <c:ext xmlns:c16="http://schemas.microsoft.com/office/drawing/2014/chart" uri="{C3380CC4-5D6E-409C-BE32-E72D297353CC}">
+                <c16:uniqueId val="{00000002-F778-4991-8286-C8E98D5345CB}"/>
+              </c:ext>
+            </c:extLst>
           </c:dPt>
           <c:dPt>
             <c:idx val="2"/>
@@ -216,9 +249,21 @@
               </a:solidFill>
               <a:effectLst/>
             </c:spPr>
+            <c:extLst>
+              <c:ext xmlns:c16="http://schemas.microsoft.com/office/drawing/2014/chart" uri="{C3380CC4-5D6E-409C-BE32-E72D297353CC}">
+                <c16:uniqueId val="{00000004-F778-4991-8286-C8E98D5345CB}"/>
+              </c:ext>
+            </c:extLst>
           </c:dPt>
           <c:dLbls>
             <c:numFmt formatCode="0.0#\ &quot;s&quot;" sourceLinked="0"/>
+            <c:spPr>
+              <a:noFill/>
+              <a:ln>
+                <a:noFill/>
+              </a:ln>
+              <a:effectLst/>
+            </c:spPr>
             <c:txPr>
               <a:bodyPr/>
               <a:lstStyle/>
@@ -241,6 +286,11 @@
             <c:showPercent val="0"/>
             <c:showBubbleSize val="0"/>
             <c:showLeaderLines val="0"/>
+            <c:extLst>
+              <c:ext xmlns:c15="http://schemas.microsoft.com/office/drawing/2012/chart" uri="{CE6537A1-D6FC-4f65-9D91-7224C49458BB}">
+                <c15:showLeaderLines val="0"/>
+              </c:ext>
+            </c:extLst>
           </c:dLbls>
           <c:cat>
             <c:strRef>
@@ -277,6 +327,11 @@
               </c:numCache>
             </c:numRef>
           </c:val>
+          <c:extLst>
+            <c:ext xmlns:c16="http://schemas.microsoft.com/office/drawing/2014/chart" uri="{C3380CC4-5D6E-409C-BE32-E72D297353CC}">
+              <c16:uniqueId val="{00000005-F778-4991-8286-C8E98D5345CB}"/>
+            </c:ext>
+          </c:extLst>
         </c:ser>
         <c:dLbls>
           <c:showLegendKey val="0"/>
@@ -492,7 +547,7 @@
           <a:p>
             <a:fld id="{EC34A2F2-539D-4180-B94A-ACCCFE959954}" type="datetimeFigureOut">
               <a:rPr lang="en-IN" smtClean="0"/>
-              <a:t>26-09-2026</a:t>
+              <a:t>28-09-2026</a:t>
             </a:fld>
             <a:endParaRPr lang="en-IN"/>
           </a:p>
@@ -556,35 +611,35 @@
           <a:p>
             <a:pPr lvl="0"/>
             <a:r>
-              <a:rPr lang="en-US" smtClean="0"/>
+              <a:rPr lang="en-US"/>
               <a:t>Click to edit Master text styles</a:t>
             </a:r>
           </a:p>
           <a:p>
             <a:pPr lvl="1"/>
             <a:r>
-              <a:rPr lang="en-US" smtClean="0"/>
+              <a:rPr lang="en-US"/>
               <a:t>Second level</a:t>
             </a:r>
           </a:p>
           <a:p>
             <a:pPr lvl="2"/>
             <a:r>
-              <a:rPr lang="en-US" smtClean="0"/>
+              <a:rPr lang="en-US"/>
               <a:t>Third level</a:t>
             </a:r>
           </a:p>
           <a:p>
             <a:pPr lvl="3"/>
             <a:r>
-              <a:rPr lang="en-US" smtClean="0"/>
+              <a:rPr lang="en-US"/>
               <a:t>Fourth level</a:t>
             </a:r>
           </a:p>
           <a:p>
             <a:pPr lvl="4"/>
             <a:r>
-              <a:rPr lang="en-US" smtClean="0"/>
+              <a:rPr lang="en-US"/>
               <a:t>Fifth level</a:t>
             </a:r>
             <a:endParaRPr lang="en-IN"/>
@@ -1328,7 +1383,7 @@
           <a:p>
             <a:r>
               <a:rPr lang="en-US" dirty="0"/>
-              <a:t>CRC only catches corrupted flash. It can't catch a clean image that crashes. So the bootloader counts trial boots. The new app must confirm itself once it knows it's healthy. If it resets three times first, we roll back to the last confirmed image. In steady state the bootloader writes nothing to flash.</a:t>
+              <a:t>CRC only catches corrupted flash. It can't catch a clean image that crashes. So the bootloader counts trial boots. The new app must confirm itself once it runs correctly. If it resets three times first, we roll back to the other bank. One bank is always confirmed, because the first image is confirmed by default. In steady state the bootloader writes nothing to flash.</a:t>
             </a:r>
           </a:p>
         </p:txBody>
@@ -1415,7 +1470,7 @@
           <a:p>
             <a:r>
               <a:rPr lang="en-US" dirty="0"/>
-              <a:t>CRC protects against accidents, not attackers. So the host signs the image. The host hashes the image with SHA-256 and signs that digest with its private key. The controller holds the matching public key in OTP memory. It checks the signature, recomputes the hash and compares. Only a match gets committed. This part is designed and integration is in progress.</a:t>
+              <a:t>CRC protects against accidents, not attackers. So the host signs the image. The host hashes the image with SHA-256 and signs that digest with its private key. The host sends its public key along with the signature. The controller first hashes that key and matches it with the key hash stored in OTP, so a fake key is rejected. Then it uses the key to verify the signature, recomputes the image hash and compares. Only a match gets committed. This part is designed and integration is in progress.</a:t>
             </a:r>
           </a:p>
         </p:txBody>
@@ -2195,7 +2250,7 @@
           <a:p>
             <a:r>
               <a:rPr lang="en-US" dirty="0"/>
-              <a:t>Walk the image left to right. The host sends metadata, then the blocks. The master checks each block, then the whole image. It routes the image by target id. The target commits it to its spare bank. The bottom half solves a race: the peripheral would otherwise boot away before the master finishes.</a:t>
+              <a:t>Walk the image left to right. The host sends metadata, then the blocks. The master checks each block, then the whole image. It routes the image by target id. The target commits it: copies it to its spare bank and reboots to try it. The bottom half solves a race: the peripheral would otherwise boot away before the master finishes.</a:t>
             </a:r>
           </a:p>
         </p:txBody>
@@ -2282,7 +2337,7 @@
           <a:p>
             <a:r>
               <a:rPr lang="en-US" dirty="0"/>
-              <a:t>This is the key design choice. The reliability logic lives in one shared core. Each link only supplies framing. The master and every peripheral run the same receive code, so we verify it once.</a:t>
+              <a:t>This is the key design choice. The reliability logic lives in one protocol-agnostic core. It never needs to know which link a block came over. Each link only supplies framing. The master and every peripheral run the same receive code, so we verify it once.</a:t>
             </a:r>
           </a:p>
         </p:txBody>
@@ -2657,18 +2712,7 @@
                 <a:ea typeface="Arial" pitchFamily="34" charset="-122"/>
                 <a:cs typeface="Arial" pitchFamily="34" charset="-120"/>
               </a:rPr>
-              <a:t>CRL Technical Symposium </a:t>
-            </a:r>
-            <a:r>
-              <a:rPr lang="en-US" sz="1000" b="1" dirty="0" smtClean="0">
-                <a:solidFill>
-                  <a:srgbClr val="0070C0"/>
-                </a:solidFill>
-                <a:latin typeface="Arial" pitchFamily="34" charset="0"/>
-                <a:ea typeface="Arial" pitchFamily="34" charset="-122"/>
-                <a:cs typeface="Arial" pitchFamily="34" charset="-120"/>
-              </a:rPr>
-              <a:t>2026</a:t>
+              <a:t>CRL Technical Symposium 2026</a:t>
             </a:r>
             <a:endParaRPr lang="en-US" sz="1000" dirty="0"/>
           </a:p>
@@ -2694,7 +2738,7 @@
           </a:prstGeom>
           <a:extLst>
             <a:ext uri="{C572A759-6A51-4108-AA02-DFA0A04FC94B}">
-              <ma14:wrappingTextBoxFlag xmlns:ma14="http://schemas.microsoft.com/office/mac/drawingml/2011/main" xmlns="" val="0"/>
+              <ma14:wrappingTextBoxFlag xmlns="" xmlns:ma14="http://schemas.microsoft.com/office/mac/drawingml/2011/main" val="0"/>
             </a:ext>
           </a:extLst>
         </p:spPr>
@@ -2772,7 +2816,7 @@
           </a:prstGeom>
           <a:extLst>
             <a:ext uri="{C572A759-6A51-4108-AA02-DFA0A04FC94B}">
-              <ma14:wrappingTextBoxFlag xmlns:ma14="http://schemas.microsoft.com/office/mac/drawingml/2011/main" xmlns="" val="0"/>
+              <ma14:wrappingTextBoxFlag xmlns="" xmlns:ma14="http://schemas.microsoft.com/office/mac/drawingml/2011/main" val="0"/>
             </a:ext>
           </a:extLst>
         </p:spPr>
@@ -5065,7 +5109,7 @@
           </a:prstGeom>
           <a:extLst>
             <a:ext uri="{C572A759-6A51-4108-AA02-DFA0A04FC94B}">
-              <ma14:wrappingTextBoxFlag xmlns:ma14="http://schemas.microsoft.com/office/mac/drawingml/2011/main" xmlns="" val="0"/>
+              <ma14:wrappingTextBoxFlag xmlns="" xmlns:ma14="http://schemas.microsoft.com/office/mac/drawingml/2011/main" val="0"/>
             </a:ext>
           </a:extLst>
         </p:spPr>
@@ -6669,7 +6713,7 @@
           </a:prstGeom>
           <a:extLst>
             <a:ext uri="{C572A759-6A51-4108-AA02-DFA0A04FC94B}">
-              <ma14:wrappingTextBoxFlag xmlns:ma14="http://schemas.microsoft.com/office/mac/drawingml/2011/main" xmlns="" val="0"/>
+              <ma14:wrappingTextBoxFlag xmlns="" xmlns:ma14="http://schemas.microsoft.com/office/mac/drawingml/2011/main" val="0"/>
             </a:ext>
           </a:extLst>
         </p:spPr>
@@ -10762,7 +10806,7 @@
           </a:prstGeom>
           <a:extLst>
             <a:ext uri="{C572A759-6A51-4108-AA02-DFA0A04FC94B}">
-              <ma14:wrappingTextBoxFlag xmlns:ma14="http://schemas.microsoft.com/office/mac/drawingml/2011/main" xmlns="" val="0"/>
+              <ma14:wrappingTextBoxFlag xmlns="" xmlns:ma14="http://schemas.microsoft.com/office/mac/drawingml/2011/main" val="0"/>
             </a:ext>
           </a:extLst>
         </p:spPr>
@@ -10943,7 +10987,7 @@
               <a:buNone/>
             </a:pPr>
             <a:r>
-              <a:rPr lang="en-US" sz="1400" b="1" dirty="0" err="1" smtClean="0">
+              <a:rPr lang="en-US" sz="1400" b="1" dirty="0" err="1">
                 <a:solidFill>
                   <a:srgbClr val="FFFFFF"/>
                 </a:solidFill>
@@ -10954,7 +10998,7 @@
               <a:t>Bootloader</a:t>
             </a:r>
             <a:r>
-              <a:rPr lang="en-US" sz="1400" b="1" dirty="0" smtClean="0">
+              <a:rPr lang="en-US" sz="1400" b="1" dirty="0">
                 <a:solidFill>
                   <a:srgbClr val="FFFFFF"/>
                 </a:solidFill>
@@ -10993,7 +11037,7 @@
               <a:buNone/>
             </a:pPr>
             <a:r>
-              <a:rPr lang="en-US" sz="1100" dirty="0" smtClean="0">
+              <a:rPr lang="en-US" sz="1100" dirty="0">
                 <a:solidFill>
                   <a:srgbClr val="FFFFFF"/>
                 </a:solidFill>
@@ -12409,7 +12453,7 @@
           </a:prstGeom>
           <a:extLst>
             <a:ext uri="{C572A759-6A51-4108-AA02-DFA0A04FC94B}">
-              <ma14:wrappingTextBoxFlag xmlns:ma14="http://schemas.microsoft.com/office/mac/drawingml/2011/main" xmlns="" val="0"/>
+              <ma14:wrappingTextBoxFlag xmlns="" xmlns:ma14="http://schemas.microsoft.com/office/mac/drawingml/2011/main" val="0"/>
             </a:ext>
           </a:extLst>
         </p:spPr>
@@ -14255,7 +14299,7 @@
           </a:prstGeom>
           <a:extLst>
             <a:ext uri="{C572A759-6A51-4108-AA02-DFA0A04FC94B}">
-              <ma14:wrappingTextBoxFlag xmlns:ma14="http://schemas.microsoft.com/office/mac/drawingml/2011/main" xmlns="" val="0"/>
+              <ma14:wrappingTextBoxFlag xmlns="" xmlns:ma14="http://schemas.microsoft.com/office/mac/drawingml/2011/main" val="0"/>
             </a:ext>
           </a:extLst>
         </p:spPr>
@@ -14815,70 +14859,6 @@
       </p:sp>
       <p:sp>
         <p:nvSpPr>
-          <p:cNvPr id="19" name="Shape 16"/>
-          <p:cNvSpPr/>
-          <p:nvPr/>
-        </p:nvSpPr>
-        <p:spPr>
-          <a:xfrm>
-            <a:off x="731520" y="4992624"/>
-            <a:ext cx="2103120" cy="914400"/>
-          </a:xfrm>
-          <a:prstGeom prst="diamond">
-            <a:avLst/>
-          </a:prstGeom>
-          <a:solidFill>
-            <a:srgbClr val="C9EDFB"/>
-          </a:solidFill>
-          <a:ln w="19050">
-            <a:solidFill>
-              <a:srgbClr val="08A1D9"/>
-            </a:solidFill>
-            <a:prstDash val="solid"/>
-          </a:ln>
-        </p:spPr>
-      </p:sp>
-      <p:sp>
-        <p:nvSpPr>
-          <p:cNvPr id="20" name="Text 17"/>
-          <p:cNvSpPr txBox="1"/>
-          <p:nvPr/>
-        </p:nvSpPr>
-        <p:spPr>
-          <a:xfrm>
-            <a:off x="1005840" y="4992624"/>
-            <a:ext cx="1554480" cy="914400"/>
-          </a:xfrm>
-          <a:prstGeom prst="rect">
-            <a:avLst/>
-          </a:prstGeom>
-          <a:noFill/>
-          <a:ln/>
-        </p:spPr>
-        <p:txBody>
-          <a:bodyPr wrap="square" lIns="0" tIns="0" rIns="0" bIns="0" rtlCol="0" anchor="ctr"/>
-          <a:lstStyle/>
-          <a:p>
-            <a:pPr marL="0" indent="0" algn="ctr">
-              <a:buNone/>
-            </a:pPr>
-            <a:r>
-              <a:rPr lang="en-US" sz="1200" b="1" dirty="0">
-                <a:solidFill>
-                  <a:srgbClr val="17365D"/>
-                </a:solidFill>
-                <a:latin typeface="Arial" pitchFamily="34" charset="0"/>
-                <a:ea typeface="Arial" pitchFamily="34" charset="-122"/>
-                <a:cs typeface="Arial" pitchFamily="34" charset="-120"/>
-              </a:rPr>
-              <a:t>Other bank valid &amp; confirmed?</a:t>
-            </a:r>
-            <a:endParaRPr lang="en-US" sz="1200" dirty="0"/>
-          </a:p>
-        </p:txBody>
-      </p:sp>
-      <p:sp>
-        <p:nvSpPr>
           <p:cNvPr id="21" name="Shape 18"/>
           <p:cNvSpPr/>
           <p:nvPr/>
@@ -14995,7 +14975,7 @@
                 <a:ea typeface="Arial" pitchFamily="34" charset="-122"/>
                 <a:cs typeface="Arial" pitchFamily="34" charset="-120"/>
               </a:rPr>
-              <a:t>Recover to the other bank if it is confirmed</a:t>
+              <a:t>Boot the other bank</a:t>
             </a:r>
             <a:endParaRPr lang="en-US" sz="1200" dirty="0"/>
           </a:p>
@@ -15243,72 +15223,9 @@
                 <a:ea typeface="Arial" pitchFamily="34" charset="-122"/>
                 <a:cs typeface="Arial" pitchFamily="34" charset="-120"/>
               </a:rPr>
-              <a:t>Attempts + 1, save, then trial boot</a:t>
+              <a:t>Count one attempt, then trial boot</a:t>
             </a:r>
             <a:endParaRPr lang="en-US" sz="1200" dirty="0"/>
-          </a:p>
-        </p:txBody>
-      </p:sp>
-      <p:sp>
-        <p:nvSpPr>
-          <p:cNvPr id="33" name="Shape 30"/>
-          <p:cNvSpPr/>
-          <p:nvPr/>
-        </p:nvSpPr>
-        <p:spPr>
-          <a:xfrm>
-            <a:off x="2834640" y="5449824"/>
-            <a:ext cx="822960" cy="0"/>
-          </a:xfrm>
-          <a:prstGeom prst="line">
-            <a:avLst/>
-          </a:prstGeom>
-          <a:noFill/>
-          <a:ln w="25400">
-            <a:solidFill>
-              <a:srgbClr val="17365D"/>
-            </a:solidFill>
-            <a:prstDash val="solid"/>
-            <a:tailEnd type="triangle"/>
-          </a:ln>
-        </p:spPr>
-      </p:sp>
-      <p:sp>
-        <p:nvSpPr>
-          <p:cNvPr id="34" name="Text 31"/>
-          <p:cNvSpPr txBox="1"/>
-          <p:nvPr/>
-        </p:nvSpPr>
-        <p:spPr>
-          <a:xfrm>
-            <a:off x="2971800" y="5202936"/>
-            <a:ext cx="548640" cy="228600"/>
-          </a:xfrm>
-          <a:prstGeom prst="rect">
-            <a:avLst/>
-          </a:prstGeom>
-          <a:noFill/>
-          <a:ln/>
-        </p:spPr>
-        <p:txBody>
-          <a:bodyPr wrap="square" lIns="0" tIns="0" rIns="0" bIns="0" rtlCol="0" anchor="t"/>
-          <a:lstStyle/>
-          <a:p>
-            <a:pPr marL="0" indent="0">
-              <a:buNone/>
-            </a:pPr>
-            <a:r>
-              <a:rPr lang="en-US" sz="1100" b="1" dirty="0">
-                <a:solidFill>
-                  <a:srgbClr val="1E8E5A"/>
-                </a:solidFill>
-                <a:latin typeface="Arial" pitchFamily="34" charset="0"/>
-                <a:ea typeface="Arial" pitchFamily="34" charset="-122"/>
-                <a:cs typeface="Arial" pitchFamily="34" charset="-120"/>
-              </a:rPr>
-              <a:t>yes</a:t>
-            </a:r>
-            <a:endParaRPr lang="en-US" sz="1100" dirty="0"/>
           </a:p>
         </p:txBody>
       </p:sp>
@@ -15320,8 +15237,8 @@
         </p:nvSpPr>
         <p:spPr>
           <a:xfrm>
-            <a:off x="3703320" y="5084064"/>
-            <a:ext cx="3291840" cy="731520"/>
+            <a:off x="548640" y="4983480"/>
+            <a:ext cx="2468880" cy="731520"/>
           </a:xfrm>
           <a:prstGeom prst="roundRect">
             <a:avLst>
@@ -15342,8 +15259,8 @@
         </p:nvSpPr>
         <p:spPr>
           <a:xfrm>
-            <a:off x="3794760" y="5084064"/>
-            <a:ext cx="3108960" cy="731520"/>
+            <a:off x="640080" y="4983480"/>
+            <a:ext cx="2286000" cy="731520"/>
           </a:xfrm>
           <a:prstGeom prst="rect">
             <a:avLst/>
@@ -15367,133 +15284,9 @@
                 <a:ea typeface="Arial" pitchFamily="34" charset="-122"/>
                 <a:cs typeface="Arial" pitchFamily="34" charset="-120"/>
               </a:rPr>
-              <a:t>Roll back: retire the failed image</a:t>
+              <a:t>Roll back to the other bank</a:t>
             </a:r>
             <a:endParaRPr lang="en-US" sz="1200" dirty="0"/>
-          </a:p>
-        </p:txBody>
-      </p:sp>
-      <p:sp>
-        <p:nvSpPr>
-          <p:cNvPr id="37" name="Shape 34"/>
-          <p:cNvSpPr/>
-          <p:nvPr/>
-        </p:nvSpPr>
-        <p:spPr>
-          <a:xfrm>
-            <a:off x="1783080" y="5907024"/>
-            <a:ext cx="0" cy="164592"/>
-          </a:xfrm>
-          <a:prstGeom prst="line">
-            <a:avLst/>
-          </a:prstGeom>
-          <a:noFill/>
-          <a:ln w="25400">
-            <a:solidFill>
-              <a:srgbClr val="17365D"/>
-            </a:solidFill>
-            <a:prstDash val="solid"/>
-            <a:tailEnd type="triangle"/>
-          </a:ln>
-        </p:spPr>
-      </p:sp>
-      <p:sp>
-        <p:nvSpPr>
-          <p:cNvPr id="38" name="Text 35"/>
-          <p:cNvSpPr txBox="1"/>
-          <p:nvPr/>
-        </p:nvSpPr>
-        <p:spPr>
-          <a:xfrm>
-            <a:off x="1856232" y="5852160"/>
-            <a:ext cx="548640" cy="228600"/>
-          </a:xfrm>
-          <a:prstGeom prst="rect">
-            <a:avLst/>
-          </a:prstGeom>
-          <a:noFill/>
-          <a:ln/>
-        </p:spPr>
-        <p:txBody>
-          <a:bodyPr wrap="square" lIns="0" tIns="0" rIns="0" bIns="0" rtlCol="0" anchor="t"/>
-          <a:lstStyle/>
-          <a:p>
-            <a:pPr marL="0" indent="0">
-              <a:buNone/>
-            </a:pPr>
-            <a:r>
-              <a:rPr lang="en-US" sz="1100" b="1" dirty="0">
-                <a:solidFill>
-                  <a:srgbClr val="C8102E"/>
-                </a:solidFill>
-                <a:latin typeface="Arial" pitchFamily="34" charset="0"/>
-                <a:ea typeface="Arial" pitchFamily="34" charset="-122"/>
-                <a:cs typeface="Arial" pitchFamily="34" charset="-120"/>
-              </a:rPr>
-              <a:t>no</a:t>
-            </a:r>
-            <a:endParaRPr lang="en-US" sz="1100" dirty="0"/>
-          </a:p>
-        </p:txBody>
-      </p:sp>
-      <p:sp>
-        <p:nvSpPr>
-          <p:cNvPr id="39" name="Shape 36"/>
-          <p:cNvSpPr/>
-          <p:nvPr/>
-        </p:nvSpPr>
-        <p:spPr>
-          <a:xfrm>
-            <a:off x="457200" y="6080760"/>
-            <a:ext cx="6537960" cy="292608"/>
-          </a:xfrm>
-          <a:prstGeom prst="roundRect">
-            <a:avLst>
-              <a:gd name="adj" fmla="val 18750"/>
-            </a:avLst>
-          </a:prstGeom>
-          <a:solidFill>
-            <a:srgbClr val="E3E8EE"/>
-          </a:solidFill>
-          <a:ln/>
-        </p:spPr>
-      </p:sp>
-      <p:sp>
-        <p:nvSpPr>
-          <p:cNvPr id="40" name="Text 37"/>
-          <p:cNvSpPr txBox="1"/>
-          <p:nvPr/>
-        </p:nvSpPr>
-        <p:spPr>
-          <a:xfrm>
-            <a:off x="548640" y="6080760"/>
-            <a:ext cx="6355080" cy="292608"/>
-          </a:xfrm>
-          <a:prstGeom prst="rect">
-            <a:avLst/>
-          </a:prstGeom>
-          <a:noFill/>
-          <a:ln/>
-        </p:spPr>
-        <p:txBody>
-          <a:bodyPr wrap="square" lIns="0" tIns="0" rIns="0" bIns="0" rtlCol="0" anchor="ctr"/>
-          <a:lstStyle/>
-          <a:p>
-            <a:pPr marL="0" indent="0" algn="ctr">
-              <a:buNone/>
-            </a:pPr>
-            <a:r>
-              <a:rPr lang="en-US" sz="1100" b="1" dirty="0">
-                <a:solidFill>
-                  <a:srgbClr val="17365D"/>
-                </a:solidFill>
-                <a:latin typeface="Arial" pitchFamily="34" charset="0"/>
-                <a:ea typeface="Arial" pitchFamily="34" charset="-122"/>
-                <a:cs typeface="Arial" pitchFamily="34" charset="-120"/>
-              </a:rPr>
-              <a:t>No confirmed image anywhere: stay in the bootloader, reachable by the host</a:t>
-            </a:r>
-            <a:endParaRPr lang="en-US" sz="1100" dirty="0"/>
           </a:p>
         </p:txBody>
       </p:sp>
@@ -15635,7 +15428,7 @@
                 <a:ea typeface="Arial" pitchFamily="34" charset="-122"/>
                 <a:cs typeface="Arial" pitchFamily="34" charset="-120"/>
               </a:rPr>
-              <a:t>Once the new app knows it works, it sets confirmed = true. The counter stops.</a:t>
+              <a:t>The new app marks itself confirmed once it runs correctly.</a:t>
             </a:r>
             <a:endParaRPr lang="en-US" sz="1150" dirty="0"/>
           </a:p>
@@ -15779,7 +15572,7 @@
                 <a:ea typeface="Arial" pitchFamily="34" charset="-122"/>
                 <a:cs typeface="Arial" pitchFamily="34" charset="-120"/>
               </a:rPr>
-              <a:t>Each reset before confirmation costs one attempt. After 3, we switch back.</a:t>
+              <a:t>Each reset before that uses one attempt. After 3, we switch banks.</a:t>
             </a:r>
             <a:endParaRPr lang="en-US" sz="1150" dirty="0"/>
           </a:p>
@@ -15884,7 +15677,7 @@
                 <a:ea typeface="Arial" pitchFamily="34" charset="-122"/>
                 <a:cs typeface="Arial" pitchFamily="34" charset="-120"/>
               </a:rPr>
-              <a:t>First boot is safe</a:t>
+              <a:t>One bank is always confirmed</a:t>
             </a:r>
             <a:endParaRPr lang="en-US" sz="1400" dirty="0"/>
           </a:p>
@@ -15923,7 +15716,7 @@
                 <a:ea typeface="Arial" pitchFamily="34" charset="-122"/>
                 <a:cs typeface="Arial" pitchFamily="34" charset="-120"/>
               </a:rPr>
-              <a:t>With a single image, Bank A is marked confirmed as the trusted base. We never roll back to an empty bank.</a:t>
+              <a:t>The first image is confirmed by default, so rollback always has a safe target.</a:t>
             </a:r>
             <a:endParaRPr lang="en-US" sz="1150" dirty="0"/>
           </a:p>
@@ -16093,7 +15886,7 @@
           </a:prstGeom>
           <a:extLst>
             <a:ext uri="{C572A759-6A51-4108-AA02-DFA0A04FC94B}">
-              <ma14:wrappingTextBoxFlag xmlns:ma14="http://schemas.microsoft.com/office/mac/drawingml/2011/main" xmlns="" val="0"/>
+              <ma14:wrappingTextBoxFlag xmlns="" xmlns:ma14="http://schemas.microsoft.com/office/mac/drawingml/2011/main" val="0"/>
             </a:ext>
           </a:extLst>
         </p:spPr>
@@ -16270,14 +16063,14 @@
       </p:sp>
       <p:sp>
         <p:nvSpPr>
-          <p:cNvPr id="7" name="Shape 4"/>
+          <p:cNvPr id="12" name="Shape 8"/>
           <p:cNvSpPr/>
           <p:nvPr/>
         </p:nvSpPr>
         <p:spPr>
           <a:xfrm>
             <a:off x="2240280" y="1143000"/>
-            <a:ext cx="2103120" cy="1417320"/>
+            <a:ext cx="2788920" cy="1417320"/>
           </a:xfrm>
           <a:prstGeom prst="roundRect">
             <a:avLst>
@@ -16304,7 +16097,7 @@
       </p:sp>
       <p:sp>
         <p:nvSpPr>
-          <p:cNvPr id="8" name="Shape 5"/>
+          <p:cNvPr id="13" name="Shape 9"/>
           <p:cNvSpPr/>
           <p:nvPr/>
         </p:nvSpPr>
@@ -16324,7 +16117,7 @@
       </p:sp>
       <p:pic>
         <p:nvPicPr>
-          <p:cNvPr id="9" name="Image 0" descr="preencoded.png"/>
+          <p:cNvPr id="14" name="Image 1" descr="preencoded.png"/>
           <p:cNvPicPr>
             <a:picLocks noChangeAspect="1"/>
           </p:cNvPicPr>
@@ -16338,7 +16131,7 @@
         </p:blipFill>
         <p:spPr>
           <a:xfrm>
-            <a:off x="2508199" y="1438351"/>
+            <a:off x="2505456" y="1438351"/>
             <a:ext cx="241402" cy="241402"/>
           </a:xfrm>
           <a:prstGeom prst="rect">
@@ -16348,14 +16141,14 @@
       </p:pic>
       <p:sp>
         <p:nvSpPr>
-          <p:cNvPr id="10" name="Text 6"/>
+          <p:cNvPr id="15" name="Text 10"/>
           <p:cNvSpPr txBox="1"/>
           <p:nvPr/>
         </p:nvSpPr>
         <p:spPr>
           <a:xfrm>
             <a:off x="2971800" y="1280160"/>
-            <a:ext cx="1280160" cy="548640"/>
+            <a:ext cx="1965960" cy="548640"/>
           </a:xfrm>
           <a:prstGeom prst="rect">
             <a:avLst/>
@@ -16379,7 +16172,7 @@
                 <a:ea typeface="Arial" pitchFamily="34" charset="-122"/>
                 <a:cs typeface="Arial" pitchFamily="34" charset="-120"/>
               </a:rPr>
-              <a:t>Firmware image</a:t>
+              <a:t>Hash the image</a:t>
             </a:r>
             <a:endParaRPr lang="en-US" sz="1300" dirty="0"/>
           </a:p>
@@ -16387,14 +16180,14 @@
       </p:sp>
       <p:sp>
         <p:nvSpPr>
-          <p:cNvPr id="11" name="Text 7"/>
+          <p:cNvPr id="16" name="Text 11"/>
           <p:cNvSpPr txBox="1"/>
           <p:nvPr/>
         </p:nvSpPr>
         <p:spPr>
           <a:xfrm>
             <a:off x="2377440" y="1874520"/>
-            <a:ext cx="1828800" cy="640080"/>
+            <a:ext cx="2514600" cy="640080"/>
           </a:xfrm>
           <a:prstGeom prst="rect">
             <a:avLst/>
@@ -16418,7 +16211,7 @@
                 <a:ea typeface="Arial" pitchFamily="34" charset="-122"/>
                 <a:cs typeface="Arial" pitchFamily="34" charset="-120"/>
               </a:rPr>
-              <a:t>The build to deploy.</a:t>
+              <a:t>SHA-256 over the whole firmware image.</a:t>
             </a:r>
             <a:endParaRPr lang="en-US" sz="1150" dirty="0"/>
           </a:p>
@@ -16426,14 +16219,14 @@
       </p:sp>
       <p:sp>
         <p:nvSpPr>
-          <p:cNvPr id="12" name="Shape 8"/>
+          <p:cNvPr id="17" name="Shape 12"/>
           <p:cNvSpPr/>
           <p:nvPr/>
         </p:nvSpPr>
         <p:spPr>
           <a:xfrm>
-            <a:off x="4663440" y="1143000"/>
-            <a:ext cx="2103120" cy="1417320"/>
+            <a:off x="5532120" y="1143000"/>
+            <a:ext cx="2788920" cy="1417320"/>
           </a:xfrm>
           <a:prstGeom prst="roundRect">
             <a:avLst>
@@ -16460,13 +16253,13 @@
       </p:sp>
       <p:sp>
         <p:nvSpPr>
-          <p:cNvPr id="13" name="Shape 9"/>
+          <p:cNvPr id="18" name="Shape 13"/>
           <p:cNvSpPr/>
           <p:nvPr/>
         </p:nvSpPr>
         <p:spPr>
           <a:xfrm>
-            <a:off x="4800600" y="1307592"/>
+            <a:off x="5669280" y="1307592"/>
             <a:ext cx="502920" cy="502920"/>
           </a:xfrm>
           <a:prstGeom prst="ellipse">
@@ -16480,7 +16273,7 @@
       </p:sp>
       <p:pic>
         <p:nvPicPr>
-          <p:cNvPr id="14" name="Image 1" descr="preencoded.png"/>
+          <p:cNvPr id="19" name="Image 2" descr="preencoded.png"/>
           <p:cNvPicPr>
             <a:picLocks noChangeAspect="1"/>
           </p:cNvPicPr>
@@ -16494,7 +16287,7 @@
         </p:blipFill>
         <p:spPr>
           <a:xfrm>
-            <a:off x="4931359" y="1438351"/>
+            <a:off x="5797296" y="1438351"/>
             <a:ext cx="241402" cy="241402"/>
           </a:xfrm>
           <a:prstGeom prst="rect">
@@ -16504,14 +16297,14 @@
       </p:pic>
       <p:sp>
         <p:nvSpPr>
-          <p:cNvPr id="15" name="Text 10"/>
-          <p:cNvSpPr txBox="1"/>
-          <p:nvPr/>
-        </p:nvSpPr>
-        <p:spPr>
-          <a:xfrm>
-            <a:off x="5394960" y="1280160"/>
-            <a:ext cx="1280160" cy="548640"/>
+          <p:cNvPr id="20" name="Text 14"/>
+          <p:cNvSpPr txBox="1"/>
+          <p:nvPr/>
+        </p:nvSpPr>
+        <p:spPr>
+          <a:xfrm>
+            <a:off x="6263640" y="1280160"/>
+            <a:ext cx="1965960" cy="548640"/>
           </a:xfrm>
           <a:prstGeom prst="rect">
             <a:avLst/>
@@ -16535,7 +16328,7 @@
                 <a:ea typeface="Arial" pitchFamily="34" charset="-122"/>
                 <a:cs typeface="Arial" pitchFamily="34" charset="-120"/>
               </a:rPr>
-              <a:t>SHA-256 digest</a:t>
+              <a:t>Sign with private key</a:t>
             </a:r>
             <a:endParaRPr lang="en-US" sz="1300" dirty="0"/>
           </a:p>
@@ -16543,14 +16336,14 @@
       </p:sp>
       <p:sp>
         <p:nvSpPr>
-          <p:cNvPr id="16" name="Text 11"/>
-          <p:cNvSpPr txBox="1"/>
-          <p:nvPr/>
-        </p:nvSpPr>
-        <p:spPr>
-          <a:xfrm>
-            <a:off x="4800600" y="1874520"/>
-            <a:ext cx="1828800" cy="640080"/>
+          <p:cNvPr id="21" name="Text 15"/>
+          <p:cNvSpPr txBox="1"/>
+          <p:nvPr/>
+        </p:nvSpPr>
+        <p:spPr>
+          <a:xfrm>
+            <a:off x="5669280" y="1874520"/>
+            <a:ext cx="2514600" cy="640080"/>
           </a:xfrm>
           <a:prstGeom prst="rect">
             <a:avLst/>
@@ -16574,7 +16367,7 @@
                 <a:ea typeface="Arial" pitchFamily="34" charset="-122"/>
                 <a:cs typeface="Arial" pitchFamily="34" charset="-120"/>
               </a:rPr>
-              <a:t>Hash the whole image.</a:t>
+              <a:t>Signs the digest. The private key never leaves the host.</a:t>
             </a:r>
             <a:endParaRPr lang="en-US" sz="1150" dirty="0"/>
           </a:p>
@@ -16582,14 +16375,14 @@
       </p:sp>
       <p:sp>
         <p:nvSpPr>
-          <p:cNvPr id="17" name="Shape 12"/>
+          <p:cNvPr id="22" name="Shape 16"/>
           <p:cNvSpPr/>
           <p:nvPr/>
         </p:nvSpPr>
         <p:spPr>
           <a:xfrm>
-            <a:off x="7086600" y="1143000"/>
-            <a:ext cx="2103120" cy="1417320"/>
+            <a:off x="8823960" y="1143000"/>
+            <a:ext cx="2788920" cy="1417320"/>
           </a:xfrm>
           <a:prstGeom prst="roundRect">
             <a:avLst>
@@ -16616,13 +16409,13 @@
       </p:sp>
       <p:sp>
         <p:nvSpPr>
-          <p:cNvPr id="18" name="Shape 13"/>
+          <p:cNvPr id="23" name="Shape 17"/>
           <p:cNvSpPr/>
           <p:nvPr/>
         </p:nvSpPr>
         <p:spPr>
           <a:xfrm>
-            <a:off x="7223760" y="1307592"/>
+            <a:off x="8961120" y="1307592"/>
             <a:ext cx="502920" cy="502920"/>
           </a:xfrm>
           <a:prstGeom prst="ellipse">
@@ -16636,7 +16429,7 @@
       </p:sp>
       <p:pic>
         <p:nvPicPr>
-          <p:cNvPr id="19" name="Image 2" descr="preencoded.png"/>
+          <p:cNvPr id="24" name="Image 3" descr="preencoded.png"/>
           <p:cNvPicPr>
             <a:picLocks noChangeAspect="1"/>
           </p:cNvPicPr>
@@ -16650,7 +16443,7 @@
         </p:blipFill>
         <p:spPr>
           <a:xfrm>
-            <a:off x="7354519" y="1438351"/>
+            <a:off x="9089136" y="1438351"/>
             <a:ext cx="241402" cy="241402"/>
           </a:xfrm>
           <a:prstGeom prst="rect">
@@ -16660,14 +16453,14 @@
       </p:pic>
       <p:sp>
         <p:nvSpPr>
-          <p:cNvPr id="20" name="Text 14"/>
-          <p:cNvSpPr txBox="1"/>
-          <p:nvPr/>
-        </p:nvSpPr>
-        <p:spPr>
-          <a:xfrm>
-            <a:off x="7818120" y="1280160"/>
-            <a:ext cx="1280160" cy="548640"/>
+          <p:cNvPr id="25" name="Text 18"/>
+          <p:cNvSpPr txBox="1"/>
+          <p:nvPr/>
+        </p:nvSpPr>
+        <p:spPr>
+          <a:xfrm>
+            <a:off x="9555480" y="1280160"/>
+            <a:ext cx="1965960" cy="548640"/>
           </a:xfrm>
           <a:prstGeom prst="rect">
             <a:avLst/>
@@ -16691,7 +16484,7 @@
                 <a:ea typeface="Arial" pitchFamily="34" charset="-122"/>
                 <a:cs typeface="Arial" pitchFamily="34" charset="-120"/>
               </a:rPr>
-              <a:t>Sign with private key</a:t>
+              <a:t>Send in META</a:t>
             </a:r>
             <a:endParaRPr lang="en-US" sz="1300" dirty="0"/>
           </a:p>
@@ -16699,14 +16492,14 @@
       </p:sp>
       <p:sp>
         <p:nvSpPr>
-          <p:cNvPr id="21" name="Text 15"/>
-          <p:cNvSpPr txBox="1"/>
-          <p:nvPr/>
-        </p:nvSpPr>
-        <p:spPr>
-          <a:xfrm>
-            <a:off x="7223760" y="1874520"/>
-            <a:ext cx="1828800" cy="640080"/>
+          <p:cNvPr id="26" name="Text 19"/>
+          <p:cNvSpPr txBox="1"/>
+          <p:nvPr/>
+        </p:nvSpPr>
+        <p:spPr>
+          <a:xfrm>
+            <a:off x="8961120" y="1874520"/>
+            <a:ext cx="2514600" cy="640080"/>
           </a:xfrm>
           <a:prstGeom prst="rect">
             <a:avLst/>
@@ -16730,163 +16523,7 @@
                 <a:ea typeface="Arial" pitchFamily="34" charset="-122"/>
                 <a:cs typeface="Arial" pitchFamily="34" charset="-120"/>
               </a:rPr>
-              <a:t>Key never leaves the host.</a:t>
-            </a:r>
-            <a:endParaRPr lang="en-US" sz="1150" dirty="0"/>
-          </a:p>
-        </p:txBody>
-      </p:sp>
-      <p:sp>
-        <p:nvSpPr>
-          <p:cNvPr id="22" name="Shape 16"/>
-          <p:cNvSpPr/>
-          <p:nvPr/>
-        </p:nvSpPr>
-        <p:spPr>
-          <a:xfrm>
-            <a:off x="9509760" y="1143000"/>
-            <a:ext cx="2103120" cy="1417320"/>
-          </a:xfrm>
-          <a:prstGeom prst="roundRect">
-            <a:avLst>
-              <a:gd name="adj" fmla="val 6452"/>
-            </a:avLst>
-          </a:prstGeom>
-          <a:solidFill>
-            <a:srgbClr val="FFFFFF"/>
-          </a:solidFill>
-          <a:ln w="19050">
-            <a:solidFill>
-              <a:srgbClr val="17365D"/>
-            </a:solidFill>
-            <a:prstDash val="solid"/>
-          </a:ln>
-          <a:effectLst>
-            <a:outerShdw blurRad="76200" dist="25400" dir="5400000" algn="bl" rotWithShape="0">
-              <a:srgbClr val="7A8CA3">
-                <a:alpha val="25000"/>
-              </a:srgbClr>
-            </a:outerShdw>
-          </a:effectLst>
-        </p:spPr>
-      </p:sp>
-      <p:sp>
-        <p:nvSpPr>
-          <p:cNvPr id="23" name="Shape 17"/>
-          <p:cNvSpPr/>
-          <p:nvPr/>
-        </p:nvSpPr>
-        <p:spPr>
-          <a:xfrm>
-            <a:off x="9646920" y="1307592"/>
-            <a:ext cx="502920" cy="502920"/>
-          </a:xfrm>
-          <a:prstGeom prst="ellipse">
-            <a:avLst/>
-          </a:prstGeom>
-          <a:solidFill>
-            <a:srgbClr val="17365D"/>
-          </a:solidFill>
-          <a:ln/>
-        </p:spPr>
-      </p:sp>
-      <p:pic>
-        <p:nvPicPr>
-          <p:cNvPr id="24" name="Image 3" descr="preencoded.png"/>
-          <p:cNvPicPr>
-            <a:picLocks noChangeAspect="1"/>
-          </p:cNvPicPr>
-          <p:nvPr/>
-        </p:nvPicPr>
-        <p:blipFill>
-          <a:blip r:embed="rId6"/>
-          <a:stretch>
-            <a:fillRect/>
-          </a:stretch>
-        </p:blipFill>
-        <p:spPr>
-          <a:xfrm>
-            <a:off x="9777679" y="1438351"/>
-            <a:ext cx="241402" cy="241402"/>
-          </a:xfrm>
-          <a:prstGeom prst="rect">
-            <a:avLst/>
-          </a:prstGeom>
-        </p:spPr>
-      </p:pic>
-      <p:sp>
-        <p:nvSpPr>
-          <p:cNvPr id="25" name="Text 18"/>
-          <p:cNvSpPr txBox="1"/>
-          <p:nvPr/>
-        </p:nvSpPr>
-        <p:spPr>
-          <a:xfrm>
-            <a:off x="10241280" y="1280160"/>
-            <a:ext cx="1280160" cy="548640"/>
-          </a:xfrm>
-          <a:prstGeom prst="rect">
-            <a:avLst/>
-          </a:prstGeom>
-          <a:noFill/>
-          <a:ln/>
-        </p:spPr>
-        <p:txBody>
-          <a:bodyPr wrap="square" lIns="0" tIns="0" rIns="0" bIns="0" rtlCol="0" anchor="ctr"/>
-          <a:lstStyle/>
-          <a:p>
-            <a:pPr marL="0" indent="0">
-              <a:buNone/>
-            </a:pPr>
-            <a:r>
-              <a:rPr lang="en-US" sz="1300" b="1" dirty="0">
-                <a:solidFill>
-                  <a:srgbClr val="17365D"/>
-                </a:solidFill>
-                <a:latin typeface="Arial" pitchFamily="34" charset="0"/>
-                <a:ea typeface="Arial" pitchFamily="34" charset="-122"/>
-                <a:cs typeface="Arial" pitchFamily="34" charset="-120"/>
-              </a:rPr>
-              <a:t>Signature in META</a:t>
-            </a:r>
-            <a:endParaRPr lang="en-US" sz="1300" dirty="0"/>
-          </a:p>
-        </p:txBody>
-      </p:sp>
-      <p:sp>
-        <p:nvSpPr>
-          <p:cNvPr id="26" name="Text 19"/>
-          <p:cNvSpPr txBox="1"/>
-          <p:nvPr/>
-        </p:nvSpPr>
-        <p:spPr>
-          <a:xfrm>
-            <a:off x="9646920" y="1874520"/>
-            <a:ext cx="1828800" cy="640080"/>
-          </a:xfrm>
-          <a:prstGeom prst="rect">
-            <a:avLst/>
-          </a:prstGeom>
-          <a:noFill/>
-          <a:ln/>
-        </p:spPr>
-        <p:txBody>
-          <a:bodyPr wrap="square" lIns="0" tIns="0" rIns="0" bIns="0" rtlCol="0" anchor="t"/>
-          <a:lstStyle/>
-          <a:p>
-            <a:pPr marL="0" indent="0">
-              <a:buNone/>
-            </a:pPr>
-            <a:r>
-              <a:rPr lang="en-US" sz="1150" dirty="0">
-                <a:solidFill>
-                  <a:srgbClr val="1E2A3A"/>
-                </a:solidFill>
-                <a:latin typeface="Arial" pitchFamily="34" charset="0"/>
-                <a:ea typeface="Arial" pitchFamily="34" charset="-122"/>
-                <a:cs typeface="Arial" pitchFamily="34" charset="-120"/>
-              </a:rPr>
-              <a:t>Travels ahead of the data.</a:t>
+              <a:t>Signature and public key travel ahead of the image.</a:t>
             </a:r>
             <a:endParaRPr lang="en-US" sz="1150" dirty="0"/>
           </a:p>
@@ -16900,8 +16537,8 @@
         </p:nvSpPr>
         <p:spPr>
           <a:xfrm>
-            <a:off x="4370832" y="1847088"/>
-            <a:ext cx="265176" cy="0"/>
+            <a:off x="5074920" y="1847088"/>
+            <a:ext cx="411480" cy="0"/>
           </a:xfrm>
           <a:prstGeom prst="line">
             <a:avLst/>
@@ -16924,8 +16561,8 @@
         </p:nvSpPr>
         <p:spPr>
           <a:xfrm>
-            <a:off x="6793992" y="1847088"/>
-            <a:ext cx="265176" cy="0"/>
+            <a:off x="8366760" y="1847088"/>
+            <a:ext cx="411480" cy="0"/>
           </a:xfrm>
           <a:prstGeom prst="line">
             <a:avLst/>
@@ -16942,37 +16579,13 @@
       </p:sp>
       <p:sp>
         <p:nvSpPr>
-          <p:cNvPr id="29" name="Shape 22"/>
-          <p:cNvSpPr/>
-          <p:nvPr/>
-        </p:nvSpPr>
-        <p:spPr>
-          <a:xfrm>
-            <a:off x="9217152" y="1847088"/>
-            <a:ext cx="265176" cy="0"/>
-          </a:xfrm>
-          <a:prstGeom prst="line">
-            <a:avLst/>
-          </a:prstGeom>
-          <a:noFill/>
-          <a:ln w="25400">
-            <a:solidFill>
-              <a:srgbClr val="17365D"/>
-            </a:solidFill>
-            <a:prstDash val="solid"/>
-            <a:tailEnd type="triangle"/>
-          </a:ln>
-        </p:spPr>
-      </p:sp>
-      <p:sp>
-        <p:nvSpPr>
           <p:cNvPr id="30" name="Shape 23"/>
           <p:cNvSpPr/>
           <p:nvPr/>
         </p:nvSpPr>
         <p:spPr>
           <a:xfrm>
-            <a:off x="10561320" y="2606040"/>
+            <a:off x="10218420" y="2606040"/>
             <a:ext cx="0" cy="411480"/>
           </a:xfrm>
           <a:prstGeom prst="line">
@@ -17079,8 +16692,8 @@
         </p:nvSpPr>
         <p:spPr>
           <a:xfrm>
-            <a:off x="9509760" y="3291840"/>
-            <a:ext cx="2103120" cy="1417320"/>
+            <a:off x="8823960" y="3291840"/>
+            <a:ext cx="2788920" cy="1417320"/>
           </a:xfrm>
           <a:prstGeom prst="roundRect">
             <a:avLst>
@@ -17113,7 +16726,7 @@
         </p:nvSpPr>
         <p:spPr>
           <a:xfrm>
-            <a:off x="9646920" y="3456432"/>
+            <a:off x="8961120" y="3456432"/>
             <a:ext cx="502920" cy="502920"/>
           </a:xfrm>
           <a:prstGeom prst="ellipse">
@@ -17134,14 +16747,14 @@
           <p:nvPr/>
         </p:nvPicPr>
         <p:blipFill>
-          <a:blip r:embed="rId7"/>
+          <a:blip r:embed="rId6"/>
           <a:stretch>
             <a:fillRect/>
           </a:stretch>
         </p:blipFill>
         <p:spPr>
           <a:xfrm>
-            <a:off x="9777679" y="3587191"/>
+            <a:off x="9089136" y="3587191"/>
             <a:ext cx="241402" cy="241402"/>
           </a:xfrm>
           <a:prstGeom prst="rect">
@@ -17157,8 +16770,8 @@
         </p:nvSpPr>
         <p:spPr>
           <a:xfrm>
-            <a:off x="10241280" y="3429000"/>
-            <a:ext cx="1280160" cy="548640"/>
+            <a:off x="9555480" y="3429000"/>
+            <a:ext cx="1965960" cy="548640"/>
           </a:xfrm>
           <a:prstGeom prst="rect">
             <a:avLst/>
@@ -17182,7 +16795,7 @@
                 <a:ea typeface="Arial" pitchFamily="34" charset="-122"/>
                 <a:cs typeface="Arial" pitchFamily="34" charset="-120"/>
               </a:rPr>
-              <a:t>Public key in OTP</a:t>
+              <a:t>Check public key</a:t>
             </a:r>
             <a:endParaRPr lang="en-US" sz="1300" dirty="0"/>
           </a:p>
@@ -17196,8 +16809,8 @@
         </p:nvSpPr>
         <p:spPr>
           <a:xfrm>
-            <a:off x="9646920" y="4023360"/>
-            <a:ext cx="1828800" cy="640080"/>
+            <a:off x="8961120" y="4023360"/>
+            <a:ext cx="2514600" cy="640080"/>
           </a:xfrm>
           <a:prstGeom prst="rect">
             <a:avLst/>
@@ -17221,7 +16834,7 @@
                 <a:ea typeface="Arial" pitchFamily="34" charset="-122"/>
                 <a:cs typeface="Arial" pitchFamily="34" charset="-120"/>
               </a:rPr>
-              <a:t>Burned once. Can't be swapped.</a:t>
+              <a:t>Hash the received key. Match it with the key hash stored in OTP.</a:t>
             </a:r>
             <a:endParaRPr lang="en-US" sz="1150" dirty="0"/>
           </a:p>
@@ -17235,8 +16848,8 @@
         </p:nvSpPr>
         <p:spPr>
           <a:xfrm>
-            <a:off x="7086600" y="3291840"/>
-            <a:ext cx="2103120" cy="1417320"/>
+            <a:off x="5532120" y="3291840"/>
+            <a:ext cx="2788920" cy="1417320"/>
           </a:xfrm>
           <a:prstGeom prst="roundRect">
             <a:avLst>
@@ -17269,7 +16882,7 @@
         </p:nvSpPr>
         <p:spPr>
           <a:xfrm>
-            <a:off x="7223760" y="3456432"/>
+            <a:off x="5669280" y="3456432"/>
             <a:ext cx="502920" cy="502920"/>
           </a:xfrm>
           <a:prstGeom prst="ellipse">
@@ -17284,162 +16897,6 @@
       <p:pic>
         <p:nvPicPr>
           <p:cNvPr id="41" name="Image 5" descr="preencoded.png"/>
-          <p:cNvPicPr>
-            <a:picLocks noChangeAspect="1"/>
-          </p:cNvPicPr>
-          <p:nvPr/>
-        </p:nvPicPr>
-        <p:blipFill>
-          <a:blip r:embed="rId5"/>
-          <a:stretch>
-            <a:fillRect/>
-          </a:stretch>
-        </p:blipFill>
-        <p:spPr>
-          <a:xfrm>
-            <a:off x="7354519" y="3587191"/>
-            <a:ext cx="241402" cy="241402"/>
-          </a:xfrm>
-          <a:prstGeom prst="rect">
-            <a:avLst/>
-          </a:prstGeom>
-        </p:spPr>
-      </p:pic>
-      <p:sp>
-        <p:nvSpPr>
-          <p:cNvPr id="42" name="Text 33"/>
-          <p:cNvSpPr txBox="1"/>
-          <p:nvPr/>
-        </p:nvSpPr>
-        <p:spPr>
-          <a:xfrm>
-            <a:off x="7818120" y="3429000"/>
-            <a:ext cx="1280160" cy="548640"/>
-          </a:xfrm>
-          <a:prstGeom prst="rect">
-            <a:avLst/>
-          </a:prstGeom>
-          <a:noFill/>
-          <a:ln/>
-        </p:spPr>
-        <p:txBody>
-          <a:bodyPr wrap="square" lIns="0" tIns="0" rIns="0" bIns="0" rtlCol="0" anchor="ctr"/>
-          <a:lstStyle/>
-          <a:p>
-            <a:pPr marL="0" indent="0">
-              <a:buNone/>
-            </a:pPr>
-            <a:r>
-              <a:rPr lang="en-US" sz="1300" b="1" dirty="0">
-                <a:solidFill>
-                  <a:srgbClr val="17365D"/>
-                </a:solidFill>
-                <a:latin typeface="Arial" pitchFamily="34" charset="0"/>
-                <a:ea typeface="Arial" pitchFamily="34" charset="-122"/>
-                <a:cs typeface="Arial" pitchFamily="34" charset="-120"/>
-              </a:rPr>
-              <a:t>Check signature</a:t>
-            </a:r>
-            <a:endParaRPr lang="en-US" sz="1300" dirty="0"/>
-          </a:p>
-        </p:txBody>
-      </p:sp>
-      <p:sp>
-        <p:nvSpPr>
-          <p:cNvPr id="43" name="Text 34"/>
-          <p:cNvSpPr txBox="1"/>
-          <p:nvPr/>
-        </p:nvSpPr>
-        <p:spPr>
-          <a:xfrm>
-            <a:off x="7223760" y="4023360"/>
-            <a:ext cx="1828800" cy="640080"/>
-          </a:xfrm>
-          <a:prstGeom prst="rect">
-            <a:avLst/>
-          </a:prstGeom>
-          <a:noFill/>
-          <a:ln/>
-        </p:spPr>
-        <p:txBody>
-          <a:bodyPr wrap="square" lIns="0" tIns="0" rIns="0" bIns="0" rtlCol="0" anchor="t"/>
-          <a:lstStyle/>
-          <a:p>
-            <a:pPr marL="0" indent="0">
-              <a:buNone/>
-            </a:pPr>
-            <a:r>
-              <a:rPr lang="en-US" sz="1150" dirty="0">
-                <a:solidFill>
-                  <a:srgbClr val="1E2A3A"/>
-                </a:solidFill>
-                <a:latin typeface="Arial" pitchFamily="34" charset="0"/>
-                <a:ea typeface="Arial" pitchFamily="34" charset="-122"/>
-                <a:cs typeface="Arial" pitchFamily="34" charset="-120"/>
-              </a:rPr>
-              <a:t>Recover the host's digest.</a:t>
-            </a:r>
-            <a:endParaRPr lang="en-US" sz="1150" dirty="0"/>
-          </a:p>
-        </p:txBody>
-      </p:sp>
-      <p:sp>
-        <p:nvSpPr>
-          <p:cNvPr id="44" name="Shape 35"/>
-          <p:cNvSpPr/>
-          <p:nvPr/>
-        </p:nvSpPr>
-        <p:spPr>
-          <a:xfrm>
-            <a:off x="4663440" y="3291840"/>
-            <a:ext cx="2103120" cy="1417320"/>
-          </a:xfrm>
-          <a:prstGeom prst="roundRect">
-            <a:avLst>
-              <a:gd name="adj" fmla="val 6452"/>
-            </a:avLst>
-          </a:prstGeom>
-          <a:solidFill>
-            <a:srgbClr val="FFFFFF"/>
-          </a:solidFill>
-          <a:ln w="19050">
-            <a:solidFill>
-              <a:srgbClr val="08A1D9"/>
-            </a:solidFill>
-            <a:prstDash val="solid"/>
-          </a:ln>
-          <a:effectLst>
-            <a:outerShdw blurRad="76200" dist="25400" dir="5400000" algn="bl" rotWithShape="0">
-              <a:srgbClr val="7A8CA3">
-                <a:alpha val="25000"/>
-              </a:srgbClr>
-            </a:outerShdw>
-          </a:effectLst>
-        </p:spPr>
-      </p:sp>
-      <p:sp>
-        <p:nvSpPr>
-          <p:cNvPr id="45" name="Shape 36"/>
-          <p:cNvSpPr/>
-          <p:nvPr/>
-        </p:nvSpPr>
-        <p:spPr>
-          <a:xfrm>
-            <a:off x="4800600" y="3456432"/>
-            <a:ext cx="502920" cy="502920"/>
-          </a:xfrm>
-          <a:prstGeom prst="ellipse">
-            <a:avLst/>
-          </a:prstGeom>
-          <a:solidFill>
-            <a:srgbClr val="08A1D9"/>
-          </a:solidFill>
-          <a:ln/>
-        </p:spPr>
-      </p:sp>
-      <p:pic>
-        <p:nvPicPr>
-          <p:cNvPr id="46" name="Image 6" descr="preencoded.png"/>
           <p:cNvPicPr>
             <a:picLocks noChangeAspect="1"/>
           </p:cNvPicPr>
@@ -17453,7 +16910,7 @@
         </p:blipFill>
         <p:spPr>
           <a:xfrm>
-            <a:off x="4931359" y="3587191"/>
+            <a:off x="5797296" y="3587191"/>
             <a:ext cx="241402" cy="241402"/>
           </a:xfrm>
           <a:prstGeom prst="rect">
@@ -17463,14 +16920,14 @@
       </p:pic>
       <p:sp>
         <p:nvSpPr>
-          <p:cNvPr id="47" name="Text 37"/>
-          <p:cNvSpPr txBox="1"/>
-          <p:nvPr/>
-        </p:nvSpPr>
-        <p:spPr>
-          <a:xfrm>
-            <a:off x="5394960" y="3429000"/>
-            <a:ext cx="1280160" cy="548640"/>
+          <p:cNvPr id="42" name="Text 33"/>
+          <p:cNvSpPr txBox="1"/>
+          <p:nvPr/>
+        </p:nvSpPr>
+        <p:spPr>
+          <a:xfrm>
+            <a:off x="6263640" y="3429000"/>
+            <a:ext cx="1965960" cy="548640"/>
           </a:xfrm>
           <a:prstGeom prst="rect">
             <a:avLst/>
@@ -17494,7 +16951,7 @@
                 <a:ea typeface="Arial" pitchFamily="34" charset="-122"/>
                 <a:cs typeface="Arial" pitchFamily="34" charset="-120"/>
               </a:rPr>
-              <a:t>Compute SHA-256</a:t>
+              <a:t>Verify signature</a:t>
             </a:r>
             <a:endParaRPr lang="en-US" sz="1300" dirty="0"/>
           </a:p>
@@ -17502,14 +16959,14 @@
       </p:sp>
       <p:sp>
         <p:nvSpPr>
-          <p:cNvPr id="48" name="Text 38"/>
-          <p:cNvSpPr txBox="1"/>
-          <p:nvPr/>
-        </p:nvSpPr>
-        <p:spPr>
-          <a:xfrm>
-            <a:off x="4800600" y="4023360"/>
-            <a:ext cx="1828800" cy="640080"/>
+          <p:cNvPr id="43" name="Text 34"/>
+          <p:cNvSpPr txBox="1"/>
+          <p:nvPr/>
+        </p:nvSpPr>
+        <p:spPr>
+          <a:xfrm>
+            <a:off x="5669280" y="4023360"/>
+            <a:ext cx="2514600" cy="640080"/>
           </a:xfrm>
           <a:prstGeom prst="rect">
             <a:avLst/>
@@ -17533,7 +16990,7 @@
                 <a:ea typeface="Arial" pitchFamily="34" charset="-122"/>
                 <a:cs typeface="Arial" pitchFamily="34" charset="-120"/>
               </a:rPr>
-              <a:t>Hash the received image.</a:t>
+              <a:t>Use the checked key to recover the host's digest.</a:t>
             </a:r>
             <a:endParaRPr lang="en-US" sz="1150" dirty="0"/>
           </a:p>
@@ -17548,7 +17005,7 @@
         <p:spPr>
           <a:xfrm>
             <a:off x="2240280" y="3291840"/>
-            <a:ext cx="2103120" cy="1417320"/>
+            <a:ext cx="2788920" cy="1417320"/>
           </a:xfrm>
           <a:prstGeom prst="roundRect">
             <a:avLst>
@@ -17602,14 +17059,14 @@
           <p:nvPr/>
         </p:nvPicPr>
         <p:blipFill>
-          <a:blip r:embed="rId8"/>
+          <a:blip r:embed="rId7"/>
           <a:stretch>
             <a:fillRect/>
           </a:stretch>
         </p:blipFill>
         <p:spPr>
           <a:xfrm>
-            <a:off x="2508199" y="3587191"/>
+            <a:off x="2505456" y="3587191"/>
             <a:ext cx="241402" cy="241402"/>
           </a:xfrm>
           <a:prstGeom prst="rect">
@@ -17626,7 +17083,7 @@
         <p:spPr>
           <a:xfrm>
             <a:off x="2971800" y="3429000"/>
-            <a:ext cx="1280160" cy="548640"/>
+            <a:ext cx="1965960" cy="548640"/>
           </a:xfrm>
           <a:prstGeom prst="rect">
             <a:avLst/>
@@ -17650,7 +17107,7 @@
                 <a:ea typeface="Arial" pitchFamily="34" charset="-122"/>
                 <a:cs typeface="Arial" pitchFamily="34" charset="-120"/>
               </a:rPr>
-              <a:t>Compare</a:t>
+              <a:t>Hash image &amp; compare</a:t>
             </a:r>
             <a:endParaRPr lang="en-US" sz="1300" dirty="0"/>
           </a:p>
@@ -17665,7 +17122,7 @@
         <p:spPr>
           <a:xfrm>
             <a:off x="2377440" y="4023360"/>
-            <a:ext cx="1828800" cy="640080"/>
+            <a:ext cx="2514600" cy="640080"/>
           </a:xfrm>
           <a:prstGeom prst="rect">
             <a:avLst/>
@@ -17689,7 +17146,7 @@
                 <a:ea typeface="Arial" pitchFamily="34" charset="-122"/>
                 <a:cs typeface="Arial" pitchFamily="34" charset="-120"/>
               </a:rPr>
-              <a:t>Match → commit. Else IMAGE_FAIL.</a:t>
+              <a:t>Compute SHA-256 of the image. Match → commit. Else IMAGE_FAIL.</a:t>
             </a:r>
             <a:endParaRPr lang="en-US" sz="1150" dirty="0"/>
           </a:p>
@@ -17703,8 +17160,8 @@
         </p:nvSpPr>
         <p:spPr>
           <a:xfrm flipH="1">
-            <a:off x="9217152" y="3995928"/>
-            <a:ext cx="265176" cy="0"/>
+            <a:off x="8366760" y="3995928"/>
+            <a:ext cx="411480" cy="0"/>
           </a:xfrm>
           <a:prstGeom prst="line">
             <a:avLst/>
@@ -17727,8 +17184,8 @@
         </p:nvSpPr>
         <p:spPr>
           <a:xfrm flipH="1">
-            <a:off x="6793992" y="3995928"/>
-            <a:ext cx="265176" cy="0"/>
+            <a:off x="5074920" y="3995928"/>
+            <a:ext cx="411480" cy="0"/>
           </a:xfrm>
           <a:prstGeom prst="line">
             <a:avLst/>
@@ -17743,30 +17200,6 @@
           </a:ln>
         </p:spPr>
       </p:sp>
-      <p:sp>
-        <p:nvSpPr>
-          <p:cNvPr id="56" name="Shape 45"/>
-          <p:cNvSpPr/>
-          <p:nvPr/>
-        </p:nvSpPr>
-        <p:spPr>
-          <a:xfrm flipH="1">
-            <a:off x="4370832" y="3995928"/>
-            <a:ext cx="265176" cy="0"/>
-          </a:xfrm>
-          <a:prstGeom prst="line">
-            <a:avLst/>
-          </a:prstGeom>
-          <a:noFill/>
-          <a:ln w="25400">
-            <a:solidFill>
-              <a:srgbClr val="08A1D9"/>
-            </a:solidFill>
-            <a:prstDash val="solid"/>
-            <a:tailEnd type="triangle"/>
-          </a:ln>
-        </p:spPr>
-      </p:sp>
       <p:pic>
         <p:nvPicPr>
           <p:cNvPr id="57" name="Image 8" descr="preencoded.png"/>
@@ -17776,7 +17209,7 @@
           <p:nvPr/>
         </p:nvPicPr>
         <p:blipFill>
-          <a:blip r:embed="rId9"/>
+          <a:blip r:embed="rId8"/>
           <a:stretch>
             <a:fillRect/>
           </a:stretch>
@@ -17856,7 +17289,7 @@
           <p:nvPr/>
         </p:nvPicPr>
         <p:blipFill>
-          <a:blip r:embed="rId9"/>
+          <a:blip r:embed="rId8"/>
           <a:stretch>
             <a:fillRect/>
           </a:stretch>
@@ -17904,7 +17337,7 @@
                 <a:ea typeface="Arial" pitchFamily="34" charset="-122"/>
                 <a:cs typeface="Arial" pitchFamily="34" charset="-120"/>
               </a:rPr>
-              <a:t>The key can't be replaced.</a:t>
+              <a:t>A fake key is rejected.</a:t>
             </a:r>
             <a:endParaRPr lang="en-US" sz="1250" dirty="0"/>
           </a:p>
@@ -17921,7 +17354,7 @@
                 <a:ea typeface="Arial" pitchFamily="34" charset="-122"/>
                 <a:cs typeface="Arial" pitchFamily="34" charset="-120"/>
               </a:rPr>
-              <a:t>OTP memory is written once at production.</a:t>
+              <a:t>Its hash won't match the one burned into OTP.</a:t>
             </a:r>
             <a:endParaRPr lang="en-US" sz="1250" dirty="0"/>
           </a:p>
@@ -17936,7 +17369,7 @@
           <p:nvPr/>
         </p:nvPicPr>
         <p:blipFill>
-          <a:blip r:embed="rId9"/>
+          <a:blip r:embed="rId8"/>
           <a:stretch>
             <a:fillRect/>
           </a:stretch>
@@ -18004,67 +17437,6 @@
               <a:t>Whole-image CRC-32 first, then the signature.</a:t>
             </a:r>
             <a:endParaRPr lang="en-US" sz="1250" dirty="0"/>
-          </a:p>
-        </p:txBody>
-      </p:sp>
-      <p:sp>
-        <p:nvSpPr>
-          <p:cNvPr id="63" name="Shape 49"/>
-          <p:cNvSpPr/>
-          <p:nvPr/>
-        </p:nvSpPr>
-        <p:spPr>
-          <a:xfrm>
-            <a:off x="10332720" y="5120640"/>
-            <a:ext cx="1399032" cy="822960"/>
-          </a:xfrm>
-          <a:prstGeom prst="roundRect">
-            <a:avLst>
-              <a:gd name="adj" fmla="val 11111"/>
-            </a:avLst>
-          </a:prstGeom>
-          <a:solidFill>
-            <a:srgbClr val="D98A00"/>
-          </a:solidFill>
-          <a:ln/>
-        </p:spPr>
-      </p:sp>
-      <p:sp>
-        <p:nvSpPr>
-          <p:cNvPr id="64" name="Text 50"/>
-          <p:cNvSpPr txBox="1"/>
-          <p:nvPr/>
-        </p:nvSpPr>
-        <p:spPr>
-          <a:xfrm>
-            <a:off x="10378440" y="5120640"/>
-            <a:ext cx="1307592" cy="822960"/>
-          </a:xfrm>
-          <a:prstGeom prst="rect">
-            <a:avLst/>
-          </a:prstGeom>
-          <a:noFill/>
-          <a:ln/>
-        </p:spPr>
-        <p:txBody>
-          <a:bodyPr wrap="square" lIns="0" tIns="0" rIns="0" bIns="0" rtlCol="0" anchor="ctr"/>
-          <a:lstStyle/>
-          <a:p>
-            <a:pPr marL="0" indent="0" algn="ctr">
-              <a:buNone/>
-            </a:pPr>
-            <a:r>
-              <a:rPr lang="en-US" sz="1100" b="1" dirty="0">
-                <a:solidFill>
-                  <a:srgbClr val="FFFFFF"/>
-                </a:solidFill>
-                <a:latin typeface="Arial" pitchFamily="34" charset="0"/>
-                <a:ea typeface="Arial" pitchFamily="34" charset="-122"/>
-                <a:cs typeface="Arial" pitchFamily="34" charset="-120"/>
-              </a:rPr>
-              <a:t>Design stage: integration in progress</a:t>
-            </a:r>
-            <a:endParaRPr lang="en-US" sz="1100" dirty="0"/>
           </a:p>
         </p:txBody>
       </p:sp>
@@ -18088,7 +17460,7 @@
           </a:prstGeom>
           <a:extLst>
             <a:ext uri="{C572A759-6A51-4108-AA02-DFA0A04FC94B}">
-              <ma14:wrappingTextBoxFlag xmlns:ma14="http://schemas.microsoft.com/office/mac/drawingml/2011/main" xmlns="" val="0"/>
+              <ma14:wrappingTextBoxFlag xmlns="" xmlns:ma14="http://schemas.microsoft.com/office/mac/drawingml/2011/main" val="0"/>
             </a:ext>
           </a:extLst>
         </p:spPr>
@@ -19701,7 +19073,7 @@
           </a:prstGeom>
           <a:extLst>
             <a:ext uri="{C572A759-6A51-4108-AA02-DFA0A04FC94B}">
-              <ma14:wrappingTextBoxFlag xmlns:ma14="http://schemas.microsoft.com/office/mac/drawingml/2011/main" xmlns="" val="0"/>
+              <ma14:wrappingTextBoxFlag xmlns="" xmlns:ma14="http://schemas.microsoft.com/office/mac/drawingml/2011/main" val="0"/>
             </a:ext>
           </a:extLst>
         </p:spPr>
@@ -19802,7 +19174,7 @@
         <p:spPr>
           <a:xfrm>
             <a:off x="457200" y="960120"/>
-            <a:ext cx="11265408" cy="384048"/>
+            <a:ext cx="6903720" cy="384048"/>
           </a:xfrm>
           <a:prstGeom prst="roundRect">
             <a:avLst>
@@ -19824,7 +19196,7 @@
         <p:spPr>
           <a:xfrm>
             <a:off x="457200" y="960120"/>
-            <a:ext cx="11262946" cy="384048"/>
+            <a:ext cx="6903720" cy="384048"/>
           </a:xfrm>
           <a:prstGeom prst="rect">
             <a:avLst/>
@@ -19865,7 +19237,7 @@
         <p:spPr>
           <a:xfrm>
             <a:off x="457200" y="1399032"/>
-            <a:ext cx="11262946" cy="4864608"/>
+            <a:ext cx="6903720" cy="4864608"/>
           </a:xfrm>
           <a:prstGeom prst="roundRect">
             <a:avLst>
@@ -19911,7 +19283,7 @@
         <p:spPr>
           <a:xfrm>
             <a:off x="1234440" y="1600200"/>
-            <a:ext cx="10149840" cy="502920"/>
+            <a:ext cx="6035040" cy="502920"/>
           </a:xfrm>
           <a:prstGeom prst="rect">
             <a:avLst/>
@@ -19927,7 +19299,7 @@
               <a:buNone/>
             </a:pPr>
             <a:r>
-              <a:rPr lang="en-US" sz="1800" dirty="0">
+              <a:rPr lang="en-US" sz="1600" dirty="0">
                 <a:solidFill>
                   <a:srgbClr val="1E2A3A"/>
                 </a:solidFill>
@@ -19937,7 +19309,7 @@
               </a:rPr>
               <a:t>One reliable-transfer protocol serves UDP, CAN-FD and UART.</a:t>
             </a:r>
-            <a:endParaRPr lang="en-US" sz="1800" dirty="0"/>
+            <a:endParaRPr lang="en-US" sz="1600" dirty="0"/>
           </a:p>
         </p:txBody>
       </p:sp>
@@ -19974,7 +19346,7 @@
         <p:spPr>
           <a:xfrm>
             <a:off x="1234440" y="2359152"/>
-            <a:ext cx="10149840" cy="502920"/>
+            <a:ext cx="6035040" cy="502920"/>
           </a:xfrm>
           <a:prstGeom prst="rect">
             <a:avLst/>
@@ -19990,7 +19362,7 @@
               <a:buNone/>
             </a:pPr>
             <a:r>
-              <a:rPr lang="en-US" sz="1800" dirty="0">
+              <a:rPr lang="en-US" sz="1600" dirty="0">
                 <a:solidFill>
                   <a:srgbClr val="1E2A3A"/>
                 </a:solidFill>
@@ -20000,7 +19372,7 @@
               </a:rPr>
               <a:t>A coverage bitmap tells the sender exactly which blocks to resend.</a:t>
             </a:r>
-            <a:endParaRPr lang="en-US" sz="1800" dirty="0"/>
+            <a:endParaRPr lang="en-US" sz="1600" dirty="0"/>
           </a:p>
         </p:txBody>
       </p:sp>
@@ -20037,7 +19409,7 @@
         <p:spPr>
           <a:xfrm>
             <a:off x="1234440" y="3118104"/>
-            <a:ext cx="10149840" cy="502920"/>
+            <a:ext cx="6035040" cy="502920"/>
           </a:xfrm>
           <a:prstGeom prst="rect">
             <a:avLst/>
@@ -20053,7 +19425,7 @@
               <a:buNone/>
             </a:pPr>
             <a:r>
-              <a:rPr lang="en-US" sz="1800" dirty="0">
+              <a:rPr lang="en-US" sz="1600" dirty="0">
                 <a:solidFill>
                   <a:srgbClr val="1E2A3A"/>
                 </a:solidFill>
@@ -20063,7 +19435,7 @@
               </a:rPr>
               <a:t>The receiver reports COMPLETE before it reboots, so the host always knows.</a:t>
             </a:r>
-            <a:endParaRPr lang="en-US" sz="1800" dirty="0"/>
+            <a:endParaRPr lang="en-US" sz="1600" dirty="0"/>
           </a:p>
         </p:txBody>
       </p:sp>
@@ -20100,7 +19472,7 @@
         <p:spPr>
           <a:xfrm>
             <a:off x="1234440" y="3877056"/>
-            <a:ext cx="10149840" cy="502920"/>
+            <a:ext cx="6035040" cy="502920"/>
           </a:xfrm>
           <a:prstGeom prst="rect">
             <a:avLst/>
@@ -20116,7 +19488,7 @@
               <a:buNone/>
             </a:pPr>
             <a:r>
-              <a:rPr lang="en-US" sz="1800" dirty="0">
+              <a:rPr lang="en-US" sz="1600" dirty="0">
                 <a:solidFill>
                   <a:srgbClr val="1E2A3A"/>
                 </a:solidFill>
@@ -20126,7 +19498,7 @@
               </a:rPr>
               <a:t>Dual banks with backup-first metadata survive a power cut at any step.</a:t>
             </a:r>
-            <a:endParaRPr lang="en-US" sz="1800" dirty="0"/>
+            <a:endParaRPr lang="en-US" sz="1600" dirty="0"/>
           </a:p>
         </p:txBody>
       </p:sp>
@@ -20163,7 +19535,7 @@
         <p:spPr>
           <a:xfrm>
             <a:off x="1234440" y="4636008"/>
-            <a:ext cx="10149840" cy="502920"/>
+            <a:ext cx="6035040" cy="502920"/>
           </a:xfrm>
           <a:prstGeom prst="rect">
             <a:avLst/>
@@ -20179,7 +19551,7 @@
               <a:buNone/>
             </a:pPr>
             <a:r>
-              <a:rPr lang="en-US" sz="1800" dirty="0">
+              <a:rPr lang="en-US" sz="1600" dirty="0">
                 <a:solidFill>
                   <a:srgbClr val="1E2A3A"/>
                 </a:solidFill>
@@ -20189,7 +19561,7 @@
               </a:rPr>
               <a:t>A boot-attempt watchdog rolls a bad image back on its own.</a:t>
             </a:r>
-            <a:endParaRPr lang="en-US" sz="1800" dirty="0"/>
+            <a:endParaRPr lang="en-US" sz="1600" dirty="0"/>
           </a:p>
         </p:txBody>
       </p:sp>
@@ -20226,7 +19598,7 @@
         <p:spPr>
           <a:xfrm>
             <a:off x="1234440" y="5394960"/>
-            <a:ext cx="10149840" cy="502920"/>
+            <a:ext cx="6035040" cy="502920"/>
           </a:xfrm>
           <a:prstGeom prst="rect">
             <a:avLst/>
@@ -20242,7 +19614,7 @@
               <a:buNone/>
             </a:pPr>
             <a:r>
-              <a:rPr lang="en-US" sz="1800" dirty="0">
+              <a:rPr lang="en-US" sz="1600" dirty="0">
                 <a:solidFill>
                   <a:srgbClr val="1E2A3A"/>
                 </a:solidFill>
@@ -20252,7 +19624,7 @@
               </a:rPr>
               <a:t>Every controller runs all of this independently.</a:t>
             </a:r>
-            <a:endParaRPr lang="en-US" sz="1800" dirty="0"/>
+            <a:endParaRPr lang="en-US" sz="1600" dirty="0"/>
           </a:p>
         </p:txBody>
       </p:sp>
@@ -20276,7 +19648,7 @@
           </a:prstGeom>
           <a:extLst>
             <a:ext uri="{C572A759-6A51-4108-AA02-DFA0A04FC94B}">
-              <ma14:wrappingTextBoxFlag xmlns:ma14="http://schemas.microsoft.com/office/mac/drawingml/2011/main" xmlns="" val="0"/>
+              <ma14:wrappingTextBoxFlag xmlns="" xmlns:ma14="http://schemas.microsoft.com/office/mac/drawingml/2011/main" val="0"/>
             </a:ext>
           </a:extLst>
         </p:spPr>
@@ -20301,6 +19673,408 @@
               <a:t>18</a:t>
             </a:fld>
             <a:endParaRPr lang="en-US"/>
+          </a:p>
+        </p:txBody>
+      </p:sp>
+      <p:sp>
+        <p:nvSpPr>
+          <p:cNvPr id="41" name="FW Shape 41"/>
+          <p:cNvSpPr/>
+          <p:nvPr/>
+        </p:nvSpPr>
+        <p:spPr>
+          <a:xfrm>
+            <a:off x="7589520" y="960120"/>
+            <a:ext cx="4133087" cy="384048"/>
+          </a:xfrm>
+          <a:prstGeom prst="roundRect">
+            <a:avLst>
+              <a:gd name="adj" fmla="val 14286"/>
+            </a:avLst>
+          </a:prstGeom>
+          <a:solidFill>
+            <a:srgbClr val="08A1D9"/>
+          </a:solidFill>
+          <a:ln>
+            <a:noFill/>
+          </a:ln>
+        </p:spPr>
+      </p:sp>
+      <p:sp>
+        <p:nvSpPr>
+          <p:cNvPr id="42" name="FW Text 42"/>
+          <p:cNvSpPr txBox="1"/>
+          <p:nvPr/>
+        </p:nvSpPr>
+        <p:spPr>
+          <a:xfrm>
+            <a:off x="7680960" y="960120"/>
+            <a:ext cx="3950207" cy="384048"/>
+          </a:xfrm>
+          <a:prstGeom prst="rect">
+            <a:avLst/>
+          </a:prstGeom>
+          <a:noFill/>
+          <a:ln/>
+        </p:spPr>
+        <p:txBody>
+          <a:bodyPr wrap="square" lIns="0" tIns="0" rIns="0" bIns="0" rtlCol="0" anchor="ctr"/>
+          <a:lstStyle/>
+          <a:p>
+            <a:pPr algn="ctr"/>
+            <a:r>
+              <a:rPr lang="en-US" sz="1500" b="1" dirty="0">
+                <a:solidFill>
+                  <a:srgbClr val="FFFFFF"/>
+                </a:solidFill>
+                <a:latin typeface="Arial"/>
+                <a:ea typeface="Arial"/>
+                <a:cs typeface="Arial"/>
+              </a:rPr>
+              <a:t>Future work</a:t>
+            </a:r>
+          </a:p>
+        </p:txBody>
+      </p:sp>
+      <p:sp>
+        <p:nvSpPr>
+          <p:cNvPr id="43" name="FW Shape 43"/>
+          <p:cNvSpPr/>
+          <p:nvPr/>
+        </p:nvSpPr>
+        <p:spPr>
+          <a:xfrm>
+            <a:off x="7589520" y="1399032"/>
+            <a:ext cx="4133087" cy="4864608"/>
+          </a:xfrm>
+          <a:prstGeom prst="roundRect">
+            <a:avLst>
+              <a:gd name="adj" fmla="val 5000"/>
+            </a:avLst>
+          </a:prstGeom>
+          <a:solidFill>
+            <a:srgbClr val="E8F6FD"/>
+          </a:solidFill>
+          <a:ln>
+            <a:noFill/>
+          </a:ln>
+        </p:spPr>
+      </p:sp>
+      <p:sp>
+        <p:nvSpPr>
+          <p:cNvPr id="44" name="FW Text 44"/>
+          <p:cNvSpPr txBox="1"/>
+          <p:nvPr/>
+        </p:nvSpPr>
+        <p:spPr>
+          <a:xfrm>
+            <a:off x="7863840" y="1600200"/>
+            <a:ext cx="3584447" cy="822960"/>
+          </a:xfrm>
+          <a:prstGeom prst="rect">
+            <a:avLst/>
+          </a:prstGeom>
+          <a:noFill/>
+          <a:ln/>
+        </p:spPr>
+        <p:txBody>
+          <a:bodyPr wrap="square" lIns="0" tIns="0" rIns="0" bIns="0" rtlCol="0" anchor="t"/>
+          <a:lstStyle/>
+          <a:p>
+            <a:pPr algn="l"/>
+            <a:r>
+              <a:rPr lang="en-US" sz="1800" b="1" dirty="0">
+                <a:solidFill>
+                  <a:srgbClr val="17365D"/>
+                </a:solidFill>
+                <a:latin typeface="Arial"/>
+                <a:ea typeface="Arial"/>
+                <a:cs typeface="Arial"/>
+              </a:rPr>
+              <a:t>A self-updating controller network</a:t>
+            </a:r>
+          </a:p>
+        </p:txBody>
+      </p:sp>
+      <p:sp>
+        <p:nvSpPr>
+          <p:cNvPr id="45" name="FW Shape 45"/>
+          <p:cNvSpPr/>
+          <p:nvPr/>
+        </p:nvSpPr>
+        <p:spPr>
+          <a:xfrm>
+            <a:off x="7863840" y="2697480"/>
+            <a:ext cx="457200" cy="457200"/>
+          </a:xfrm>
+          <a:prstGeom prst="ellipse">
+            <a:avLst/>
+          </a:prstGeom>
+          <a:solidFill>
+            <a:srgbClr val="08A1D9"/>
+          </a:solidFill>
+          <a:ln>
+            <a:noFill/>
+          </a:ln>
+        </p:spPr>
+      </p:sp>
+      <p:sp>
+        <p:nvSpPr>
+          <p:cNvPr id="46" name="FW Text 46"/>
+          <p:cNvSpPr txBox="1"/>
+          <p:nvPr/>
+        </p:nvSpPr>
+        <p:spPr>
+          <a:xfrm>
+            <a:off x="7863840" y="2697480"/>
+            <a:ext cx="457200" cy="457200"/>
+          </a:xfrm>
+          <a:prstGeom prst="rect">
+            <a:avLst/>
+          </a:prstGeom>
+          <a:noFill/>
+          <a:ln/>
+        </p:spPr>
+        <p:txBody>
+          <a:bodyPr wrap="square" lIns="0" tIns="0" rIns="0" bIns="0" rtlCol="0" anchor="ctr"/>
+          <a:lstStyle/>
+          <a:p>
+            <a:pPr algn="ctr"/>
+            <a:r>
+              <a:rPr lang="en-US" sz="1500" b="1" dirty="0">
+                <a:solidFill>
+                  <a:srgbClr val="FFFFFF"/>
+                </a:solidFill>
+                <a:latin typeface="Arial"/>
+                <a:ea typeface="Arial"/>
+                <a:cs typeface="Arial"/>
+              </a:rPr>
+              <a:t>1</a:t>
+            </a:r>
+          </a:p>
+        </p:txBody>
+      </p:sp>
+      <p:sp>
+        <p:nvSpPr>
+          <p:cNvPr id="47" name="FW Text 47"/>
+          <p:cNvSpPr txBox="1"/>
+          <p:nvPr/>
+        </p:nvSpPr>
+        <p:spPr>
+          <a:xfrm>
+            <a:off x="8458200" y="2606040"/>
+            <a:ext cx="3035807" cy="640080"/>
+          </a:xfrm>
+          <a:prstGeom prst="rect">
+            <a:avLst/>
+          </a:prstGeom>
+          <a:noFill/>
+          <a:ln/>
+        </p:spPr>
+        <p:txBody>
+          <a:bodyPr wrap="square" lIns="0" tIns="0" rIns="0" bIns="0" rtlCol="0" anchor="ctr"/>
+          <a:lstStyle/>
+          <a:p>
+            <a:pPr algn="l"/>
+            <a:r>
+              <a:rPr lang="en-US" sz="1600" b="0" dirty="0">
+                <a:solidFill>
+                  <a:srgbClr val="1E2A3A"/>
+                </a:solidFill>
+                <a:latin typeface="Arial"/>
+                <a:ea typeface="Arial"/>
+                <a:cs typeface="Arial"/>
+              </a:rPr>
+              <a:t>Controllers discover each other automatically.</a:t>
+            </a:r>
+          </a:p>
+        </p:txBody>
+      </p:sp>
+      <p:sp>
+        <p:nvSpPr>
+          <p:cNvPr id="48" name="FW Shape 48"/>
+          <p:cNvSpPr/>
+          <p:nvPr/>
+        </p:nvSpPr>
+        <p:spPr>
+          <a:xfrm>
+            <a:off x="7863840" y="3840479"/>
+            <a:ext cx="457200" cy="457200"/>
+          </a:xfrm>
+          <a:prstGeom prst="ellipse">
+            <a:avLst/>
+          </a:prstGeom>
+          <a:solidFill>
+            <a:srgbClr val="1F6FB5"/>
+          </a:solidFill>
+          <a:ln>
+            <a:noFill/>
+          </a:ln>
+        </p:spPr>
+      </p:sp>
+      <p:sp>
+        <p:nvSpPr>
+          <p:cNvPr id="49" name="FW Text 49"/>
+          <p:cNvSpPr txBox="1"/>
+          <p:nvPr/>
+        </p:nvSpPr>
+        <p:spPr>
+          <a:xfrm>
+            <a:off x="7863840" y="3840479"/>
+            <a:ext cx="457200" cy="457200"/>
+          </a:xfrm>
+          <a:prstGeom prst="rect">
+            <a:avLst/>
+          </a:prstGeom>
+          <a:noFill/>
+          <a:ln/>
+        </p:spPr>
+        <p:txBody>
+          <a:bodyPr wrap="square" lIns="0" tIns="0" rIns="0" bIns="0" rtlCol="0" anchor="ctr"/>
+          <a:lstStyle/>
+          <a:p>
+            <a:pPr algn="ctr"/>
+            <a:r>
+              <a:rPr lang="en-US" sz="1500" b="1" dirty="0">
+                <a:solidFill>
+                  <a:srgbClr val="FFFFFF"/>
+                </a:solidFill>
+                <a:latin typeface="Arial"/>
+                <a:ea typeface="Arial"/>
+                <a:cs typeface="Arial"/>
+              </a:rPr>
+              <a:t>2</a:t>
+            </a:r>
+          </a:p>
+        </p:txBody>
+      </p:sp>
+      <p:sp>
+        <p:nvSpPr>
+          <p:cNvPr id="50" name="FW Text 50"/>
+          <p:cNvSpPr txBox="1"/>
+          <p:nvPr/>
+        </p:nvSpPr>
+        <p:spPr>
+          <a:xfrm>
+            <a:off x="8458200" y="3749039"/>
+            <a:ext cx="3035807" cy="640080"/>
+          </a:xfrm>
+          <a:prstGeom prst="rect">
+            <a:avLst/>
+          </a:prstGeom>
+          <a:noFill/>
+          <a:ln/>
+        </p:spPr>
+        <p:txBody>
+          <a:bodyPr wrap="square" lIns="0" tIns="0" rIns="0" bIns="0" rtlCol="0" anchor="ctr"/>
+          <a:lstStyle/>
+          <a:p>
+            <a:pPr algn="l"/>
+            <a:r>
+              <a:rPr lang="en-US" sz="1600" b="0" dirty="0">
+                <a:solidFill>
+                  <a:srgbClr val="1E2A3A"/>
+                </a:solidFill>
+                <a:latin typeface="Arial"/>
+                <a:ea typeface="Arial"/>
+                <a:cs typeface="Arial"/>
+              </a:rPr>
+              <a:t>They compare firmware versions across the network.</a:t>
+            </a:r>
+          </a:p>
+        </p:txBody>
+      </p:sp>
+      <p:sp>
+        <p:nvSpPr>
+          <p:cNvPr id="51" name="FW Shape 51"/>
+          <p:cNvSpPr/>
+          <p:nvPr/>
+        </p:nvSpPr>
+        <p:spPr>
+          <a:xfrm>
+            <a:off x="7863840" y="4983479"/>
+            <a:ext cx="457200" cy="457200"/>
+          </a:xfrm>
+          <a:prstGeom prst="ellipse">
+            <a:avLst/>
+          </a:prstGeom>
+          <a:solidFill>
+            <a:srgbClr val="08A1D9"/>
+          </a:solidFill>
+          <a:ln>
+            <a:noFill/>
+          </a:ln>
+        </p:spPr>
+      </p:sp>
+      <p:sp>
+        <p:nvSpPr>
+          <p:cNvPr id="52" name="FW Text 52"/>
+          <p:cNvSpPr txBox="1"/>
+          <p:nvPr/>
+        </p:nvSpPr>
+        <p:spPr>
+          <a:xfrm>
+            <a:off x="7863840" y="4983479"/>
+            <a:ext cx="457200" cy="457200"/>
+          </a:xfrm>
+          <a:prstGeom prst="rect">
+            <a:avLst/>
+          </a:prstGeom>
+          <a:noFill/>
+          <a:ln/>
+        </p:spPr>
+        <p:txBody>
+          <a:bodyPr wrap="square" lIns="0" tIns="0" rIns="0" bIns="0" rtlCol="0" anchor="ctr"/>
+          <a:lstStyle/>
+          <a:p>
+            <a:pPr algn="ctr"/>
+            <a:r>
+              <a:rPr lang="en-US" sz="1500" b="1" dirty="0">
+                <a:solidFill>
+                  <a:srgbClr val="FFFFFF"/>
+                </a:solidFill>
+                <a:latin typeface="Arial"/>
+                <a:ea typeface="Arial"/>
+                <a:cs typeface="Arial"/>
+              </a:rPr>
+              <a:t>3</a:t>
+            </a:r>
+          </a:p>
+        </p:txBody>
+      </p:sp>
+      <p:sp>
+        <p:nvSpPr>
+          <p:cNvPr id="53" name="FW Text 53"/>
+          <p:cNvSpPr txBox="1"/>
+          <p:nvPr/>
+        </p:nvSpPr>
+        <p:spPr>
+          <a:xfrm>
+            <a:off x="8458200" y="4892040"/>
+            <a:ext cx="3035807" cy="640080"/>
+          </a:xfrm>
+          <a:prstGeom prst="rect">
+            <a:avLst/>
+          </a:prstGeom>
+          <a:noFill/>
+          <a:ln/>
+        </p:spPr>
+        <p:txBody>
+          <a:bodyPr wrap="square" lIns="0" tIns="0" rIns="0" bIns="0" rtlCol="0" anchor="ctr"/>
+          <a:lstStyle/>
+          <a:p>
+            <a:pPr algn="l"/>
+            <a:r>
+              <a:rPr lang="en-US" sz="1600" b="0" dirty="0">
+                <a:solidFill>
+                  <a:srgbClr val="1E2A3A"/>
+                </a:solidFill>
+                <a:latin typeface="Arial"/>
+                <a:ea typeface="Arial"/>
+                <a:cs typeface="Arial"/>
+              </a:rPr>
+              <a:t>Updates spread node to node, without central control.</a:t>
+            </a:r>
           </a:p>
         </p:txBody>
       </p:sp>
@@ -21034,7 +20808,7 @@
           </a:prstGeom>
           <a:extLst>
             <a:ext uri="{C572A759-6A51-4108-AA02-DFA0A04FC94B}">
-              <ma14:wrappingTextBoxFlag xmlns:ma14="http://schemas.microsoft.com/office/mac/drawingml/2011/main" xmlns="" val="0"/>
+              <ma14:wrappingTextBoxFlag xmlns="" xmlns:ma14="http://schemas.microsoft.com/office/mac/drawingml/2011/main" val="0"/>
             </a:ext>
           </a:extLst>
         </p:spPr>
@@ -22597,7 +22371,7 @@
           </a:prstGeom>
           <a:extLst>
             <a:ext uri="{C572A759-6A51-4108-AA02-DFA0A04FC94B}">
-              <ma14:wrappingTextBoxFlag xmlns:ma14="http://schemas.microsoft.com/office/mac/drawingml/2011/main" xmlns="" val="0"/>
+              <ma14:wrappingTextBoxFlag xmlns="" xmlns:ma14="http://schemas.microsoft.com/office/mac/drawingml/2011/main" val="0"/>
             </a:ext>
           </a:extLst>
         </p:spPr>
@@ -22733,7 +22507,7 @@
           </a:prstGeom>
           <a:extLst>
             <a:ext uri="{C572A759-6A51-4108-AA02-DFA0A04FC94B}">
-              <ma14:wrappingTextBoxFlag xmlns:ma14="http://schemas.microsoft.com/office/mac/drawingml/2011/main" xmlns="" val="0"/>
+              <ma14:wrappingTextBoxFlag xmlns="" xmlns:ma14="http://schemas.microsoft.com/office/mac/drawingml/2011/main" val="0"/>
             </a:ext>
           </a:extLst>
         </p:spPr>
@@ -23678,7 +23452,7 @@
           </a:prstGeom>
           <a:extLst>
             <a:ext uri="{C572A759-6A51-4108-AA02-DFA0A04FC94B}">
-              <ma14:wrappingTextBoxFlag xmlns:ma14="http://schemas.microsoft.com/office/mac/drawingml/2011/main" xmlns="" val="0"/>
+              <ma14:wrappingTextBoxFlag xmlns="" xmlns:ma14="http://schemas.microsoft.com/office/mac/drawingml/2011/main" val="0"/>
             </a:ext>
           </a:extLst>
         </p:spPr>
@@ -23954,29 +23728,7 @@
                 <a:ea typeface="Arial" pitchFamily="34" charset="-122"/>
                 <a:cs typeface="Arial" pitchFamily="34" charset="-120"/>
               </a:rPr>
-              <a:t>Usable payload differs by </a:t>
-            </a:r>
-            <a:r>
-              <a:rPr lang="en-US" sz="1600" dirty="0" smtClean="0">
-                <a:solidFill>
-                  <a:srgbClr val="1E2A3A"/>
-                </a:solidFill>
-                <a:latin typeface="Arial" pitchFamily="34" charset="0"/>
-                <a:ea typeface="Arial" pitchFamily="34" charset="-122"/>
-                <a:cs typeface="Arial" pitchFamily="34" charset="-120"/>
-              </a:rPr>
-              <a:t>about 25</a:t>
-            </a:r>
-            <a:r>
-              <a:rPr lang="en-US" sz="1600" dirty="0">
-                <a:solidFill>
-                  <a:srgbClr val="1E2A3A"/>
-                </a:solidFill>
-                <a:latin typeface="Arial" pitchFamily="34" charset="0"/>
-                <a:ea typeface="Arial" pitchFamily="34" charset="-122"/>
-                <a:cs typeface="Arial" pitchFamily="34" charset="-120"/>
-              </a:rPr>
-              <a:t>×.</a:t>
+              <a:t>Usable payload differs by about 25×.</a:t>
             </a:r>
             <a:endParaRPr lang="en-US" sz="1600" dirty="0"/>
           </a:p>
@@ -23997,29 +23749,7 @@
                 <a:ea typeface="Arial" pitchFamily="34" charset="-122"/>
                 <a:cs typeface="Arial" pitchFamily="34" charset="-120"/>
               </a:rPr>
-              <a:t>Separate protocols per link would </a:t>
-            </a:r>
-            <a:r>
-              <a:rPr lang="en-US" sz="1600" dirty="0" smtClean="0">
-                <a:solidFill>
-                  <a:srgbClr val="1E2A3A"/>
-                </a:solidFill>
-                <a:latin typeface="Arial" pitchFamily="34" charset="0"/>
-                <a:ea typeface="Arial" pitchFamily="34" charset="-122"/>
-                <a:cs typeface="Arial" pitchFamily="34" charset="-120"/>
-              </a:rPr>
-              <a:t>multiply code </a:t>
-            </a:r>
-            <a:r>
-              <a:rPr lang="en-US" sz="1600" dirty="0">
-                <a:solidFill>
-                  <a:srgbClr val="1E2A3A"/>
-                </a:solidFill>
-                <a:latin typeface="Arial" pitchFamily="34" charset="0"/>
-                <a:ea typeface="Arial" pitchFamily="34" charset="-122"/>
-                <a:cs typeface="Arial" pitchFamily="34" charset="-120"/>
-              </a:rPr>
-              <a:t>and testing.</a:t>
+              <a:t>Separate protocols per link would multiply code and testing.</a:t>
             </a:r>
             <a:endParaRPr lang="en-US" sz="1600" dirty="0"/>
           </a:p>
@@ -24188,29 +23918,7 @@
                 <a:ea typeface="Arial" pitchFamily="34" charset="-122"/>
                 <a:cs typeface="Arial" pitchFamily="34" charset="-120"/>
               </a:rPr>
-              <a:t>Counting bytes </a:t>
-            </a:r>
-            <a:r>
-              <a:rPr lang="en-US" sz="1600" dirty="0" smtClean="0">
-                <a:solidFill>
-                  <a:srgbClr val="1E2A3A"/>
-                </a:solidFill>
-                <a:latin typeface="Arial" pitchFamily="34" charset="0"/>
-                <a:ea typeface="Arial" pitchFamily="34" charset="-122"/>
-                <a:cs typeface="Arial" pitchFamily="34" charset="-120"/>
-              </a:rPr>
-              <a:t>fails in </a:t>
-            </a:r>
-            <a:r>
-              <a:rPr lang="en-US" sz="1600" dirty="0">
-                <a:solidFill>
-                  <a:srgbClr val="1E2A3A"/>
-                </a:solidFill>
-                <a:latin typeface="Arial" pitchFamily="34" charset="0"/>
-                <a:ea typeface="Arial" pitchFamily="34" charset="-122"/>
-                <a:cs typeface="Arial" pitchFamily="34" charset="-120"/>
-              </a:rPr>
-              <a:t>two ways:</a:t>
+              <a:t>Counting bytes fails in two ways:</a:t>
             </a:r>
             <a:endParaRPr lang="en-US" sz="1600" dirty="0"/>
           </a:p>
@@ -24540,7 +24248,7 @@
           </a:prstGeom>
           <a:extLst>
             <a:ext uri="{C572A759-6A51-4108-AA02-DFA0A04FC94B}">
-              <ma14:wrappingTextBoxFlag xmlns:ma14="http://schemas.microsoft.com/office/mac/drawingml/2011/main" xmlns="" val="0"/>
+              <ma14:wrappingTextBoxFlag xmlns="" xmlns:ma14="http://schemas.microsoft.com/office/mac/drawingml/2011/main" val="0"/>
             </a:ext>
           </a:extLst>
         </p:spPr>
@@ -25903,7 +25611,7 @@
           </a:prstGeom>
           <a:extLst>
             <a:ext uri="{C572A759-6A51-4108-AA02-DFA0A04FC94B}">
-              <ma14:wrappingTextBoxFlag xmlns:ma14="http://schemas.microsoft.com/office/mac/drawingml/2011/main" xmlns="" val="0"/>
+              <ma14:wrappingTextBoxFlag xmlns="" xmlns:ma14="http://schemas.microsoft.com/office/mac/drawingml/2011/main" val="0"/>
             </a:ext>
           </a:extLst>
         </p:spPr>
@@ -26697,7 +26405,7 @@
                 <a:ea typeface="Arial" pitchFamily="34" charset="-122"/>
                 <a:cs typeface="Arial" pitchFamily="34" charset="-120"/>
               </a:rPr>
-              <a:t>Own image: flash it. Peripheral image: forward over CAN-FD, or UART.</a:t>
+              <a:t>Master reads the target id. Its own image stays. Others go to their card over CAN-FD or UART.</a:t>
             </a:r>
             <a:endParaRPr lang="en-US" sz="1300" dirty="0"/>
           </a:p>
@@ -26868,21 +26576,23 @@
           <a:bodyPr wrap="square" lIns="0" tIns="0" rIns="0" bIns="0" rtlCol="0" anchor="t"/>
           <a:lstStyle/>
           <a:p>
-            <a:pPr marL="0" indent="0" algn="ctr">
-              <a:buNone/>
-            </a:pPr>
+            <a:pPr algn="ctr"/>
             <a:r>
               <a:rPr lang="en-US" sz="1300" dirty="0">
                 <a:solidFill>
                   <a:srgbClr val="1E2A3A"/>
                 </a:solidFill>
-                <a:latin typeface="Arial" pitchFamily="34" charset="0"/>
-                <a:ea typeface="Arial" pitchFamily="34" charset="-122"/>
-                <a:cs typeface="Arial" pitchFamily="34" charset="-120"/>
-              </a:rPr>
-              <a:t>Target writes its inactive bank and reboots into a trial run.</a:t>
-            </a:r>
-            <a:endParaRPr lang="en-US" sz="1300" dirty="0"/>
+                <a:latin typeface="Arial"/>
+                <a:ea typeface="Arial" pitchFamily="34" charset="-122"/>
+                <a:cs typeface="Arial"/>
+              </a:rPr>
+              <a:t>Target copies it to its spare flash bank, then boots the image.</a:t>
+            </a:r>
+            <a:endParaRPr lang="en-US" sz="1300" dirty="0">
+              <a:latin typeface="Arial"/>
+              <a:ea typeface="Calibri"/>
+              <a:cs typeface="Calibri"/>
+            </a:endParaRPr>
           </a:p>
         </p:txBody>
       </p:sp>
@@ -27396,7 +27106,7 @@
           </a:prstGeom>
           <a:extLst>
             <a:ext uri="{C572A759-6A51-4108-AA02-DFA0A04FC94B}">
-              <ma14:wrappingTextBoxFlag xmlns:ma14="http://schemas.microsoft.com/office/mac/drawingml/2011/main" xmlns="" val="0"/>
+              <ma14:wrappingTextBoxFlag xmlns="" xmlns:ma14="http://schemas.microsoft.com/office/mac/drawingml/2011/main" val="0"/>
             </a:ext>
           </a:extLst>
         </p:spPr>
@@ -27574,7 +27284,7 @@
                 <a:ea typeface="Arial" pitchFamily="34" charset="-122"/>
                 <a:cs typeface="Arial" pitchFamily="34" charset="-120"/>
               </a:rPr>
-              <a:t>Shared updater core</a:t>
+              <a:t>Protocol-agnostic updater core</a:t>
             </a:r>
             <a:endParaRPr lang="en-US" sz="1800" dirty="0"/>
           </a:p>
@@ -28352,21 +28062,22 @@
           <a:bodyPr wrap="square" lIns="0" tIns="0" rIns="0" bIns="0" rtlCol="0" anchor="t"/>
           <a:lstStyle/>
           <a:p>
-            <a:pPr marL="0" indent="0">
-              <a:buNone/>
-            </a:pPr>
             <a:r>
               <a:rPr lang="en-US" sz="1500" b="1" dirty="0">
                 <a:solidFill>
                   <a:srgbClr val="17365D"/>
                 </a:solidFill>
-                <a:latin typeface="Arial" pitchFamily="34" charset="0"/>
-                <a:ea typeface="Arial" pitchFamily="34" charset="-122"/>
-                <a:cs typeface="Arial" pitchFamily="34" charset="-120"/>
-              </a:rPr>
-              <a:t>We write the reliability logic once.</a:t>
-            </a:r>
-            <a:endParaRPr lang="en-US" sz="1500" dirty="0"/>
+                <a:latin typeface="Arial"/>
+                <a:ea typeface="Arial" pitchFamily="34" charset="-122"/>
+                <a:cs typeface="Arial"/>
+              </a:rPr>
+              <a:t>The core is protocol-agnostic.</a:t>
+            </a:r>
+            <a:endParaRPr lang="en-US" sz="1500" dirty="0">
+              <a:latin typeface="Arial"/>
+              <a:ea typeface="Calibri"/>
+              <a:cs typeface="Calibri"/>
+            </a:endParaRPr>
           </a:p>
         </p:txBody>
       </p:sp>
@@ -28403,7 +28114,7 @@
                 <a:ea typeface="Arial" pitchFamily="34" charset="-122"/>
                 <a:cs typeface="Arial" pitchFamily="34" charset="-120"/>
               </a:rPr>
-              <a:t>Loss, duplication and reordering are handled in the core, not per link.</a:t>
+              <a:t>It handles loss and duplicates the same way on every link.</a:t>
             </a:r>
             <a:endParaRPr lang="en-US" sz="1300" dirty="0"/>
           </a:p>
@@ -28735,7 +28446,7 @@
           </a:prstGeom>
           <a:extLst>
             <a:ext uri="{C572A759-6A51-4108-AA02-DFA0A04FC94B}">
-              <ma14:wrappingTextBoxFlag xmlns:ma14="http://schemas.microsoft.com/office/mac/drawingml/2011/main" xmlns="" val="0"/>
+              <ma14:wrappingTextBoxFlag xmlns="" xmlns:ma14="http://schemas.microsoft.com/office/mac/drawingml/2011/main" val="0"/>
             </a:ext>
           </a:extLst>
         </p:spPr>
@@ -30754,7 +30465,7 @@
           </a:prstGeom>
           <a:extLst>
             <a:ext uri="{C572A759-6A51-4108-AA02-DFA0A04FC94B}">
-              <ma14:wrappingTextBoxFlag xmlns:ma14="http://schemas.microsoft.com/office/mac/drawingml/2011/main" xmlns="" val="0"/>
+              <ma14:wrappingTextBoxFlag xmlns="" xmlns:ma14="http://schemas.microsoft.com/office/mac/drawingml/2011/main" val="0"/>
             </a:ext>
           </a:extLst>
         </p:spPr>
@@ -32004,7 +31715,7 @@
           </a:prstGeom>
           <a:extLst>
             <a:ext uri="{C572A759-6A51-4108-AA02-DFA0A04FC94B}">
-              <ma14:wrappingTextBoxFlag xmlns:ma14="http://schemas.microsoft.com/office/mac/drawingml/2011/main" xmlns="" val="0"/>
+              <ma14:wrappingTextBoxFlag xmlns="" xmlns:ma14="http://schemas.microsoft.com/office/mac/drawingml/2011/main" val="0"/>
             </a:ext>
           </a:extLst>
         </p:spPr>
@@ -32329,7 +32040,7 @@
   <a:extraClrSchemeLst/>
   <a:extLst>
     <a:ext uri="{05A4C25C-085E-4340-85A3-A5531E510DB2}">
-      <thm15:themeFamily xmlns:thm15="http://schemas.microsoft.com/office/thememl/2012/main" xmlns="" name="Office Theme" id="{62F939B6-93AF-4DB8-9C6B-D6C7DFDC589F}" vid="{4A3C46E8-61CC-4603-A589-7422A47A8E4A}"/>
+      <thm15:themeFamily xmlns:thm15="http://schemas.microsoft.com/office/thememl/2012/main" name="Office Theme" id="{62F939B6-93AF-4DB8-9C6B-D6C7DFDC589F}" vid="{4A3C46E8-61CC-4603-A589-7422A47A8E4A}"/>
     </a:ext>
   </a:extLst>
 </a:theme>
